--- a/(4.7).pptx
+++ b/(4.7).pptx
@@ -6,6 +6,12 @@
   </p:sldMasterIdLst>
   <p:sldIdLst>
     <p:sldId id="257" r:id="rId2"/>
+    <p:sldId id="261" r:id="rId3"/>
+    <p:sldId id="264" r:id="rId4"/>
+    <p:sldId id="262" r:id="rId5"/>
+    <p:sldId id="263" r:id="rId6"/>
+    <p:sldId id="265" r:id="rId7"/>
+    <p:sldId id="266" r:id="rId8"/>
   </p:sldIdLst>
   <p:sldSz cx="12192000" cy="6858000"/>
   <p:notesSz cx="6858000" cy="9144000"/>
@@ -107,12 +113,20 @@
 </p:presentation>
 </file>
 
+<file path=ppt/revisionInfo.xml><?xml version="1.0" encoding="utf-8"?>
+<p1510:revInfo xmlns:a="http://schemas.openxmlformats.org/drawingml/2006/main" xmlns:r="http://schemas.openxmlformats.org/officeDocument/2006/relationships" xmlns:p1510="http://schemas.microsoft.com/office/powerpoint/2015/10/main">
+  <p1510:revLst>
+    <p1510:client id="{B268A1FA-39C5-4CA5-9E7E-29C07AD713BA}" v="41" dt="2026-04-07T08:21:29.565"/>
+  </p1510:revLst>
+</p1510:revInfo>
+</file>
+
 <file path=ppt/changesInfos/changesInfo1.xml><?xml version="1.0" encoding="utf-8"?>
 <pc:chgInfo xmlns:a="http://schemas.openxmlformats.org/drawingml/2006/main" xmlns:r="http://schemas.openxmlformats.org/officeDocument/2006/relationships" xmlns:ac="http://schemas.microsoft.com/office/drawing/2013/main/command" xmlns:pc="http://schemas.microsoft.com/office/powerpoint/2013/main/command">
   <pc:docChgLst>
     <pc:chgData name="musukie52@gmail.com" userId="017bd91f96aa8751" providerId="LiveId" clId="{5B2C3894-F97E-4CAB-8812-5BB4D83AAC6A}"/>
-    <pc:docChg chg="addSld delSld">
-      <pc:chgData name="musukie52@gmail.com" userId="017bd91f96aa8751" providerId="LiveId" clId="{5B2C3894-F97E-4CAB-8812-5BB4D83AAC6A}" dt="2026-04-07T04:56:39.208" v="2" actId="47"/>
+    <pc:docChg chg="undo custSel addSld delSld modSld sldOrd">
+      <pc:chgData name="musukie52@gmail.com" userId="017bd91f96aa8751" providerId="LiveId" clId="{5B2C3894-F97E-4CAB-8812-5BB4D83AAC6A}" dt="2026-04-07T08:21:37.359" v="4227" actId="20577"/>
       <pc:docMkLst>
         <pc:docMk/>
       </pc:docMkLst>
@@ -123,12 +137,562 @@
           <pc:sldMk cId="1824299058" sldId="256"/>
         </pc:sldMkLst>
       </pc:sldChg>
-      <pc:sldChg chg="new">
-        <pc:chgData name="musukie52@gmail.com" userId="017bd91f96aa8751" providerId="LiveId" clId="{5B2C3894-F97E-4CAB-8812-5BB4D83AAC6A}" dt="2026-04-07T04:56:34.757" v="1" actId="680"/>
+      <pc:sldChg chg="modSp new mod">
+        <pc:chgData name="musukie52@gmail.com" userId="017bd91f96aa8751" providerId="LiveId" clId="{5B2C3894-F97E-4CAB-8812-5BB4D83AAC6A}" dt="2026-04-07T05:06:31.877" v="563" actId="404"/>
         <pc:sldMkLst>
           <pc:docMk/>
           <pc:sldMk cId="4069274404" sldId="257"/>
         </pc:sldMkLst>
+        <pc:spChg chg="mod">
+          <ac:chgData name="musukie52@gmail.com" userId="017bd91f96aa8751" providerId="LiveId" clId="{5B2C3894-F97E-4CAB-8812-5BB4D83AAC6A}" dt="2026-04-07T05:06:31.877" v="563" actId="404"/>
+          <ac:spMkLst>
+            <pc:docMk/>
+            <pc:sldMk cId="4069274404" sldId="257"/>
+            <ac:spMk id="2" creationId="{A9F0D85D-00DE-9A6E-A535-9100C28592C5}"/>
+          </ac:spMkLst>
+        </pc:spChg>
+        <pc:spChg chg="mod">
+          <ac:chgData name="musukie52@gmail.com" userId="017bd91f96aa8751" providerId="LiveId" clId="{5B2C3894-F97E-4CAB-8812-5BB4D83AAC6A}" dt="2026-04-07T05:04:24.843" v="474" actId="20577"/>
+          <ac:spMkLst>
+            <pc:docMk/>
+            <pc:sldMk cId="4069274404" sldId="257"/>
+            <ac:spMk id="3" creationId="{4340B6A8-9964-106D-4D78-BEC2A581B861}"/>
+          </ac:spMkLst>
+        </pc:spChg>
+      </pc:sldChg>
+      <pc:sldChg chg="addSp delSp modSp new del mod">
+        <pc:chgData name="musukie52@gmail.com" userId="017bd91f96aa8751" providerId="LiveId" clId="{5B2C3894-F97E-4CAB-8812-5BB4D83AAC6A}" dt="2026-04-07T06:18:23.215" v="883" actId="47"/>
+        <pc:sldMkLst>
+          <pc:docMk/>
+          <pc:sldMk cId="600397851" sldId="258"/>
+        </pc:sldMkLst>
+        <pc:spChg chg="mod">
+          <ac:chgData name="musukie52@gmail.com" userId="017bd91f96aa8751" providerId="LiveId" clId="{5B2C3894-F97E-4CAB-8812-5BB4D83AAC6A}" dt="2026-04-07T05:21:23.790" v="776" actId="12"/>
+          <ac:spMkLst>
+            <pc:docMk/>
+            <pc:sldMk cId="600397851" sldId="258"/>
+            <ac:spMk id="3" creationId="{D0AFA3C3-66AF-CC04-EB73-221C5FCCF2EF}"/>
+          </ac:spMkLst>
+        </pc:spChg>
+        <pc:spChg chg="add del mod">
+          <ac:chgData name="musukie52@gmail.com" userId="017bd91f96aa8751" providerId="LiveId" clId="{5B2C3894-F97E-4CAB-8812-5BB4D83AAC6A}" dt="2026-04-07T06:18:21.161" v="882" actId="21"/>
+          <ac:spMkLst>
+            <pc:docMk/>
+            <pc:sldMk cId="600397851" sldId="258"/>
+            <ac:spMk id="4" creationId="{BFB097B4-C35C-70C0-44E8-08DBE50680AA}"/>
+          </ac:spMkLst>
+        </pc:spChg>
+      </pc:sldChg>
+      <pc:sldChg chg="new del">
+        <pc:chgData name="musukie52@gmail.com" userId="017bd91f96aa8751" providerId="LiveId" clId="{5B2C3894-F97E-4CAB-8812-5BB4D83AAC6A}" dt="2026-04-07T06:18:12.014" v="881" actId="47"/>
+        <pc:sldMkLst>
+          <pc:docMk/>
+          <pc:sldMk cId="1577549910" sldId="259"/>
+        </pc:sldMkLst>
+      </pc:sldChg>
+      <pc:sldChg chg="modSp add del mod">
+        <pc:chgData name="musukie52@gmail.com" userId="017bd91f96aa8751" providerId="LiveId" clId="{5B2C3894-F97E-4CAB-8812-5BB4D83AAC6A}" dt="2026-04-07T06:19:03.988" v="893" actId="47"/>
+        <pc:sldMkLst>
+          <pc:docMk/>
+          <pc:sldMk cId="1499802734" sldId="260"/>
+        </pc:sldMkLst>
+        <pc:spChg chg="mod">
+          <ac:chgData name="musukie52@gmail.com" userId="017bd91f96aa8751" providerId="LiveId" clId="{5B2C3894-F97E-4CAB-8812-5BB4D83AAC6A}" dt="2026-04-07T05:21:08.139" v="775" actId="27636"/>
+          <ac:spMkLst>
+            <pc:docMk/>
+            <pc:sldMk cId="1499802734" sldId="260"/>
+            <ac:spMk id="3" creationId="{812B02B3-B917-31FE-247F-8B50217F9A06}"/>
+          </ac:spMkLst>
+        </pc:spChg>
+        <pc:spChg chg="mod">
+          <ac:chgData name="musukie52@gmail.com" userId="017bd91f96aa8751" providerId="LiveId" clId="{5B2C3894-F97E-4CAB-8812-5BB4D83AAC6A}" dt="2026-04-07T05:14:48.247" v="607"/>
+          <ac:spMkLst>
+            <pc:docMk/>
+            <pc:sldMk cId="1499802734" sldId="260"/>
+            <ac:spMk id="4" creationId="{F21039A9-FE86-2089-CE9A-A9E749044870}"/>
+          </ac:spMkLst>
+        </pc:spChg>
+      </pc:sldChg>
+      <pc:sldChg chg="addSp delSp modSp new mod">
+        <pc:chgData name="musukie52@gmail.com" userId="017bd91f96aa8751" providerId="LiveId" clId="{5B2C3894-F97E-4CAB-8812-5BB4D83AAC6A}" dt="2026-04-07T06:18:24.350" v="884"/>
+        <pc:sldMkLst>
+          <pc:docMk/>
+          <pc:sldMk cId="3352289676" sldId="261"/>
+        </pc:sldMkLst>
+        <pc:spChg chg="del">
+          <ac:chgData name="musukie52@gmail.com" userId="017bd91f96aa8751" providerId="LiveId" clId="{5B2C3894-F97E-4CAB-8812-5BB4D83AAC6A}" dt="2026-04-07T05:21:30.822" v="778" actId="478"/>
+          <ac:spMkLst>
+            <pc:docMk/>
+            <pc:sldMk cId="3352289676" sldId="261"/>
+            <ac:spMk id="2" creationId="{B0965C61-702E-C05A-C83C-8565DA3A7488}"/>
+          </ac:spMkLst>
+        </pc:spChg>
+        <pc:spChg chg="del">
+          <ac:chgData name="musukie52@gmail.com" userId="017bd91f96aa8751" providerId="LiveId" clId="{5B2C3894-F97E-4CAB-8812-5BB4D83AAC6A}" dt="2026-04-07T05:21:30.822" v="778" actId="478"/>
+          <ac:spMkLst>
+            <pc:docMk/>
+            <pc:sldMk cId="3352289676" sldId="261"/>
+            <ac:spMk id="3" creationId="{7D81C256-CCF6-02BF-D38A-961FBDF98836}"/>
+          </ac:spMkLst>
+        </pc:spChg>
+        <pc:spChg chg="add mod">
+          <ac:chgData name="musukie52@gmail.com" userId="017bd91f96aa8751" providerId="LiveId" clId="{5B2C3894-F97E-4CAB-8812-5BB4D83AAC6A}" dt="2026-04-07T06:17:04.743" v="863" actId="1076"/>
+          <ac:spMkLst>
+            <pc:docMk/>
+            <pc:sldMk cId="3352289676" sldId="261"/>
+            <ac:spMk id="4" creationId="{CAADB74E-2015-DFDE-C1AF-9BD23B3BE15F}"/>
+          </ac:spMkLst>
+        </pc:spChg>
+        <pc:spChg chg="add mod">
+          <ac:chgData name="musukie52@gmail.com" userId="017bd91f96aa8751" providerId="LiveId" clId="{5B2C3894-F97E-4CAB-8812-5BB4D83AAC6A}" dt="2026-04-07T06:17:35.170" v="873" actId="1076"/>
+          <ac:spMkLst>
+            <pc:docMk/>
+            <pc:sldMk cId="3352289676" sldId="261"/>
+            <ac:spMk id="5" creationId="{F61E0317-7753-A315-9A46-9DCE2E41C00F}"/>
+          </ac:spMkLst>
+        </pc:spChg>
+        <pc:spChg chg="add mod">
+          <ac:chgData name="musukie52@gmail.com" userId="017bd91f96aa8751" providerId="LiveId" clId="{5B2C3894-F97E-4CAB-8812-5BB4D83AAC6A}" dt="2026-04-07T06:17:04.743" v="863" actId="1076"/>
+          <ac:spMkLst>
+            <pc:docMk/>
+            <pc:sldMk cId="3352289676" sldId="261"/>
+            <ac:spMk id="6" creationId="{CA87E5B1-F043-D660-8FE9-4B4109970D08}"/>
+          </ac:spMkLst>
+        </pc:spChg>
+        <pc:spChg chg="add del mod ord">
+          <ac:chgData name="musukie52@gmail.com" userId="017bd91f96aa8751" providerId="LiveId" clId="{5B2C3894-F97E-4CAB-8812-5BB4D83AAC6A}" dt="2026-04-07T06:17:35.520" v="874" actId="478"/>
+          <ac:spMkLst>
+            <pc:docMk/>
+            <pc:sldMk cId="3352289676" sldId="261"/>
+            <ac:spMk id="7" creationId="{68518FE7-555E-B523-5BAF-328D10F7BF3F}"/>
+          </ac:spMkLst>
+        </pc:spChg>
+        <pc:spChg chg="add mod">
+          <ac:chgData name="musukie52@gmail.com" userId="017bd91f96aa8751" providerId="LiveId" clId="{5B2C3894-F97E-4CAB-8812-5BB4D83AAC6A}" dt="2026-04-07T06:18:24.350" v="884"/>
+          <ac:spMkLst>
+            <pc:docMk/>
+            <pc:sldMk cId="3352289676" sldId="261"/>
+            <ac:spMk id="8" creationId="{BFB097B4-C35C-70C0-44E8-08DBE50680AA}"/>
+          </ac:spMkLst>
+        </pc:spChg>
+      </pc:sldChg>
+      <pc:sldChg chg="addSp delSp modSp add mod">
+        <pc:chgData name="musukie52@gmail.com" userId="017bd91f96aa8751" providerId="LiveId" clId="{5B2C3894-F97E-4CAB-8812-5BB4D83AAC6A}" dt="2026-04-07T08:03:46.412" v="4204" actId="14100"/>
+        <pc:sldMkLst>
+          <pc:docMk/>
+          <pc:sldMk cId="3467996113" sldId="262"/>
+        </pc:sldMkLst>
+        <pc:spChg chg="add mod">
+          <ac:chgData name="musukie52@gmail.com" userId="017bd91f96aa8751" providerId="LiveId" clId="{5B2C3894-F97E-4CAB-8812-5BB4D83AAC6A}" dt="2026-04-07T06:18:25.480" v="885"/>
+          <ac:spMkLst>
+            <pc:docMk/>
+            <pc:sldMk cId="3467996113" sldId="262"/>
+            <ac:spMk id="2" creationId="{0BF35095-BE47-CD39-F629-CB9CE5245480}"/>
+          </ac:spMkLst>
+        </pc:spChg>
+        <pc:spChg chg="add mod">
+          <ac:chgData name="musukie52@gmail.com" userId="017bd91f96aa8751" providerId="LiveId" clId="{5B2C3894-F97E-4CAB-8812-5BB4D83AAC6A}" dt="2026-04-07T08:03:46.412" v="4204" actId="14100"/>
+          <ac:spMkLst>
+            <pc:docMk/>
+            <pc:sldMk cId="3467996113" sldId="262"/>
+            <ac:spMk id="3" creationId="{DD83226E-C3CA-58C1-CC94-87ECCABF4E4B}"/>
+          </ac:spMkLst>
+        </pc:spChg>
+        <pc:spChg chg="del mod">
+          <ac:chgData name="musukie52@gmail.com" userId="017bd91f96aa8751" providerId="LiveId" clId="{5B2C3894-F97E-4CAB-8812-5BB4D83AAC6A}" dt="2026-04-07T06:20:09.875" v="937" actId="478"/>
+          <ac:spMkLst>
+            <pc:docMk/>
+            <pc:sldMk cId="3467996113" sldId="262"/>
+            <ac:spMk id="5" creationId="{61DA8808-1A93-01EA-41A2-CF37D5ACD4C6}"/>
+          </ac:spMkLst>
+        </pc:spChg>
+        <pc:spChg chg="mod">
+          <ac:chgData name="musukie52@gmail.com" userId="017bd91f96aa8751" providerId="LiveId" clId="{5B2C3894-F97E-4CAB-8812-5BB4D83AAC6A}" dt="2026-04-07T06:17:49.773" v="879" actId="1076"/>
+          <ac:spMkLst>
+            <pc:docMk/>
+            <pc:sldMk cId="3467996113" sldId="262"/>
+            <ac:spMk id="6" creationId="{0C1BBB87-FF21-7A8D-8E80-BA7D6F1AD8CD}"/>
+          </ac:spMkLst>
+        </pc:spChg>
+        <pc:spChg chg="del">
+          <ac:chgData name="musukie52@gmail.com" userId="017bd91f96aa8751" providerId="LiveId" clId="{5B2C3894-F97E-4CAB-8812-5BB4D83AAC6A}" dt="2026-04-07T06:17:39.652" v="876" actId="478"/>
+          <ac:spMkLst>
+            <pc:docMk/>
+            <pc:sldMk cId="3467996113" sldId="262"/>
+            <ac:spMk id="7" creationId="{ED727A7F-029B-E28F-9275-D21721C7D846}"/>
+          </ac:spMkLst>
+        </pc:spChg>
+      </pc:sldChg>
+      <pc:sldChg chg="addSp delSp modSp add mod">
+        <pc:chgData name="musukie52@gmail.com" userId="017bd91f96aa8751" providerId="LiveId" clId="{5B2C3894-F97E-4CAB-8812-5BB4D83AAC6A}" dt="2026-04-07T06:44:21.669" v="3654" actId="20577"/>
+        <pc:sldMkLst>
+          <pc:docMk/>
+          <pc:sldMk cId="3335290019" sldId="263"/>
+        </pc:sldMkLst>
+        <pc:spChg chg="add mod">
+          <ac:chgData name="musukie52@gmail.com" userId="017bd91f96aa8751" providerId="LiveId" clId="{5B2C3894-F97E-4CAB-8812-5BB4D83AAC6A}" dt="2026-04-07T06:20:21.760" v="965" actId="20577"/>
+          <ac:spMkLst>
+            <pc:docMk/>
+            <pc:sldMk cId="3335290019" sldId="263"/>
+            <ac:spMk id="2" creationId="{4AC7DA49-9A38-AD99-7543-03650BA03320}"/>
+          </ac:spMkLst>
+        </pc:spChg>
+        <pc:spChg chg="add mod">
+          <ac:chgData name="musukie52@gmail.com" userId="017bd91f96aa8751" providerId="LiveId" clId="{5B2C3894-F97E-4CAB-8812-5BB4D83AAC6A}" dt="2026-04-07T06:24:30.463" v="1461" actId="1076"/>
+          <ac:spMkLst>
+            <pc:docMk/>
+            <pc:sldMk cId="3335290019" sldId="263"/>
+            <ac:spMk id="3" creationId="{146BD8E4-844B-5D8C-2910-48B23722AA0E}"/>
+          </ac:spMkLst>
+        </pc:spChg>
+        <pc:spChg chg="mod">
+          <ac:chgData name="musukie52@gmail.com" userId="017bd91f96aa8751" providerId="LiveId" clId="{5B2C3894-F97E-4CAB-8812-5BB4D83AAC6A}" dt="2026-04-07T06:21:03.681" v="1011" actId="20577"/>
+          <ac:spMkLst>
+            <pc:docMk/>
+            <pc:sldMk cId="3335290019" sldId="263"/>
+            <ac:spMk id="4" creationId="{58871343-58B9-D2F9-825C-C584B6B1DFE4}"/>
+          </ac:spMkLst>
+        </pc:spChg>
+        <pc:spChg chg="del mod">
+          <ac:chgData name="musukie52@gmail.com" userId="017bd91f96aa8751" providerId="LiveId" clId="{5B2C3894-F97E-4CAB-8812-5BB4D83AAC6A}" dt="2026-04-07T06:20:15.625" v="938" actId="478"/>
+          <ac:spMkLst>
+            <pc:docMk/>
+            <pc:sldMk cId="3335290019" sldId="263"/>
+            <ac:spMk id="5" creationId="{E3D95142-4FF2-EE2D-CAEF-6EA19059DAB5}"/>
+          </ac:spMkLst>
+        </pc:spChg>
+        <pc:spChg chg="mod">
+          <ac:chgData name="musukie52@gmail.com" userId="017bd91f96aa8751" providerId="LiveId" clId="{5B2C3894-F97E-4CAB-8812-5BB4D83AAC6A}" dt="2026-04-07T06:41:29.102" v="3559" actId="20577"/>
+          <ac:spMkLst>
+            <pc:docMk/>
+            <pc:sldMk cId="3335290019" sldId="263"/>
+            <ac:spMk id="6" creationId="{B77B17CA-DC33-64FC-1081-E8D891CA3391}"/>
+          </ac:spMkLst>
+        </pc:spChg>
+        <pc:spChg chg="add mod">
+          <ac:chgData name="musukie52@gmail.com" userId="017bd91f96aa8751" providerId="LiveId" clId="{5B2C3894-F97E-4CAB-8812-5BB4D83AAC6A}" dt="2026-04-07T06:42:03.416" v="3580" actId="20577"/>
+          <ac:spMkLst>
+            <pc:docMk/>
+            <pc:sldMk cId="3335290019" sldId="263"/>
+            <ac:spMk id="7" creationId="{4B219FE4-94BE-ECD6-095E-5A9B538DE8F2}"/>
+          </ac:spMkLst>
+        </pc:spChg>
+        <pc:spChg chg="add mod">
+          <ac:chgData name="musukie52@gmail.com" userId="017bd91f96aa8751" providerId="LiveId" clId="{5B2C3894-F97E-4CAB-8812-5BB4D83AAC6A}" dt="2026-04-07T06:26:46.668" v="1490" actId="20577"/>
+          <ac:spMkLst>
+            <pc:docMk/>
+            <pc:sldMk cId="3335290019" sldId="263"/>
+            <ac:spMk id="8" creationId="{694E7E32-BBA8-D6F1-F9C5-C98C871F8827}"/>
+          </ac:spMkLst>
+        </pc:spChg>
+        <pc:spChg chg="add mod">
+          <ac:chgData name="musukie52@gmail.com" userId="017bd91f96aa8751" providerId="LiveId" clId="{5B2C3894-F97E-4CAB-8812-5BB4D83AAC6A}" dt="2026-04-07T06:43:08.573" v="3633" actId="20577"/>
+          <ac:spMkLst>
+            <pc:docMk/>
+            <pc:sldMk cId="3335290019" sldId="263"/>
+            <ac:spMk id="9" creationId="{65FB9DF3-10D5-FAE8-0CC5-C1B48F900F64}"/>
+          </ac:spMkLst>
+        </pc:spChg>
+        <pc:spChg chg="add mod">
+          <ac:chgData name="musukie52@gmail.com" userId="017bd91f96aa8751" providerId="LiveId" clId="{5B2C3894-F97E-4CAB-8812-5BB4D83AAC6A}" dt="2026-04-07T06:27:55.416" v="1677" actId="20577"/>
+          <ac:spMkLst>
+            <pc:docMk/>
+            <pc:sldMk cId="3335290019" sldId="263"/>
+            <ac:spMk id="10" creationId="{F8630DB8-C7FC-3434-F094-B1DB54A37D7F}"/>
+          </ac:spMkLst>
+        </pc:spChg>
+        <pc:spChg chg="add mod">
+          <ac:chgData name="musukie52@gmail.com" userId="017bd91f96aa8751" providerId="LiveId" clId="{5B2C3894-F97E-4CAB-8812-5BB4D83AAC6A}" dt="2026-04-07T06:43:39.089" v="3634" actId="20577"/>
+          <ac:spMkLst>
+            <pc:docMk/>
+            <pc:sldMk cId="3335290019" sldId="263"/>
+            <ac:spMk id="11" creationId="{239F6B74-06E5-81DE-4DAA-305FE7FD33A5}"/>
+          </ac:spMkLst>
+        </pc:spChg>
+        <pc:spChg chg="add mod">
+          <ac:chgData name="musukie52@gmail.com" userId="017bd91f96aa8751" providerId="LiveId" clId="{5B2C3894-F97E-4CAB-8812-5BB4D83AAC6A}" dt="2026-04-07T06:28:52.042" v="1855" actId="20577"/>
+          <ac:spMkLst>
+            <pc:docMk/>
+            <pc:sldMk cId="3335290019" sldId="263"/>
+            <ac:spMk id="12" creationId="{B13C7926-D660-0EA9-2C6D-BE35A15D03B5}"/>
+          </ac:spMkLst>
+        </pc:spChg>
+        <pc:spChg chg="add mod">
+          <ac:chgData name="musukie52@gmail.com" userId="017bd91f96aa8751" providerId="LiveId" clId="{5B2C3894-F97E-4CAB-8812-5BB4D83AAC6A}" dt="2026-04-07T06:44:21.669" v="3654" actId="20577"/>
+          <ac:spMkLst>
+            <pc:docMk/>
+            <pc:sldMk cId="3335290019" sldId="263"/>
+            <ac:spMk id="13" creationId="{30125C0F-36AB-3BF9-3857-10FC2747BBE3}"/>
+          </ac:spMkLst>
+        </pc:spChg>
+        <pc:spChg chg="add mod">
+          <ac:chgData name="musukie52@gmail.com" userId="017bd91f96aa8751" providerId="LiveId" clId="{5B2C3894-F97E-4CAB-8812-5BB4D83AAC6A}" dt="2026-04-07T06:24:27.869" v="1459"/>
+          <ac:spMkLst>
+            <pc:docMk/>
+            <pc:sldMk cId="3335290019" sldId="263"/>
+            <ac:spMk id="14" creationId="{7CD756C7-0065-E74C-F9D3-EF1F84C87195}"/>
+          </ac:spMkLst>
+        </pc:spChg>
+        <pc:spChg chg="add mod">
+          <ac:chgData name="musukie52@gmail.com" userId="017bd91f96aa8751" providerId="LiveId" clId="{5B2C3894-F97E-4CAB-8812-5BB4D83AAC6A}" dt="2026-04-07T06:24:27.869" v="1459"/>
+          <ac:spMkLst>
+            <pc:docMk/>
+            <pc:sldMk cId="3335290019" sldId="263"/>
+            <ac:spMk id="15" creationId="{104D6E29-FFF7-5B91-9F5F-35A467D1CE24}"/>
+          </ac:spMkLst>
+        </pc:spChg>
+        <pc:spChg chg="add mod">
+          <ac:chgData name="musukie52@gmail.com" userId="017bd91f96aa8751" providerId="LiveId" clId="{5B2C3894-F97E-4CAB-8812-5BB4D83AAC6A}" dt="2026-04-07T06:29:50.801" v="2034" actId="20577"/>
+          <ac:spMkLst>
+            <pc:docMk/>
+            <pc:sldMk cId="3335290019" sldId="263"/>
+            <ac:spMk id="16" creationId="{7DC96106-06FF-2B9A-2C80-E10A40D6A042}"/>
+          </ac:spMkLst>
+        </pc:spChg>
+        <pc:spChg chg="add mod">
+          <ac:chgData name="musukie52@gmail.com" userId="017bd91f96aa8751" providerId="LiveId" clId="{5B2C3894-F97E-4CAB-8812-5BB4D83AAC6A}" dt="2026-04-07T06:44:20.337" v="3653" actId="20577"/>
+          <ac:spMkLst>
+            <pc:docMk/>
+            <pc:sldMk cId="3335290019" sldId="263"/>
+            <ac:spMk id="17" creationId="{89346F67-218E-BFAB-586B-4363355922BC}"/>
+          </ac:spMkLst>
+        </pc:spChg>
+      </pc:sldChg>
+      <pc:sldChg chg="addSp delSp modSp new mod ord">
+        <pc:chgData name="musukie52@gmail.com" userId="017bd91f96aa8751" providerId="LiveId" clId="{5B2C3894-F97E-4CAB-8812-5BB4D83AAC6A}" dt="2026-04-07T06:50:00.606" v="4002"/>
+        <pc:sldMkLst>
+          <pc:docMk/>
+          <pc:sldMk cId="784013904" sldId="264"/>
+        </pc:sldMkLst>
+        <pc:spChg chg="del">
+          <ac:chgData name="musukie52@gmail.com" userId="017bd91f96aa8751" providerId="LiveId" clId="{5B2C3894-F97E-4CAB-8812-5BB4D83AAC6A}" dt="2026-04-07T06:18:41.180" v="888" actId="478"/>
+          <ac:spMkLst>
+            <pc:docMk/>
+            <pc:sldMk cId="784013904" sldId="264"/>
+            <ac:spMk id="2" creationId="{BEB4EB06-ED6C-D1E6-C0C6-6492284AE9F4}"/>
+          </ac:spMkLst>
+        </pc:spChg>
+        <pc:spChg chg="del">
+          <ac:chgData name="musukie52@gmail.com" userId="017bd91f96aa8751" providerId="LiveId" clId="{5B2C3894-F97E-4CAB-8812-5BB4D83AAC6A}" dt="2026-04-07T06:18:41.180" v="888" actId="478"/>
+          <ac:spMkLst>
+            <pc:docMk/>
+            <pc:sldMk cId="784013904" sldId="264"/>
+            <ac:spMk id="3" creationId="{7F004E3A-DA08-1D40-653E-CBA57F057370}"/>
+          </ac:spMkLst>
+        </pc:spChg>
+        <pc:spChg chg="add mod">
+          <ac:chgData name="musukie52@gmail.com" userId="017bd91f96aa8751" providerId="LiveId" clId="{5B2C3894-F97E-4CAB-8812-5BB4D83AAC6A}" dt="2026-04-07T06:18:33.956" v="887"/>
+          <ac:spMkLst>
+            <pc:docMk/>
+            <pc:sldMk cId="784013904" sldId="264"/>
+            <ac:spMk id="4" creationId="{2C59E438-06EB-B20B-130D-85B97904DCB1}"/>
+          </ac:spMkLst>
+        </pc:spChg>
+        <pc:spChg chg="add mod">
+          <ac:chgData name="musukie52@gmail.com" userId="017bd91f96aa8751" providerId="LiveId" clId="{5B2C3894-F97E-4CAB-8812-5BB4D83AAC6A}" dt="2026-04-07T06:18:41.469" v="889"/>
+          <ac:spMkLst>
+            <pc:docMk/>
+            <pc:sldMk cId="784013904" sldId="264"/>
+            <ac:spMk id="5" creationId="{E1B6CE70-439D-E6CE-3C7B-A12211E6A532}"/>
+          </ac:spMkLst>
+        </pc:spChg>
+        <pc:spChg chg="add del mod">
+          <ac:chgData name="musukie52@gmail.com" userId="017bd91f96aa8751" providerId="LiveId" clId="{5B2C3894-F97E-4CAB-8812-5BB4D83AAC6A}" dt="2026-04-07T06:20:02.968" v="934" actId="478"/>
+          <ac:spMkLst>
+            <pc:docMk/>
+            <pc:sldMk cId="784013904" sldId="264"/>
+            <ac:spMk id="6" creationId="{67A91678-B678-0A59-8FD3-AEEBF6959284}"/>
+          </ac:spMkLst>
+        </pc:spChg>
+        <pc:spChg chg="add mod">
+          <ac:chgData name="musukie52@gmail.com" userId="017bd91f96aa8751" providerId="LiveId" clId="{5B2C3894-F97E-4CAB-8812-5BB4D83AAC6A}" dt="2026-04-07T06:18:55.640" v="892" actId="2710"/>
+          <ac:spMkLst>
+            <pc:docMk/>
+            <pc:sldMk cId="784013904" sldId="264"/>
+            <ac:spMk id="7" creationId="{066780F0-DF5C-E9E7-D48A-F10C0DEE3839}"/>
+          </ac:spMkLst>
+        </pc:spChg>
+        <pc:spChg chg="add del mod">
+          <ac:chgData name="musukie52@gmail.com" userId="017bd91f96aa8751" providerId="LiveId" clId="{5B2C3894-F97E-4CAB-8812-5BB4D83AAC6A}" dt="2026-04-07T06:20:05.014" v="935" actId="478"/>
+          <ac:spMkLst>
+            <pc:docMk/>
+            <pc:sldMk cId="784013904" sldId="264"/>
+            <ac:spMk id="8" creationId="{654B2C5B-0064-3E01-48DD-A70B8124E3AC}"/>
+          </ac:spMkLst>
+        </pc:spChg>
+      </pc:sldChg>
+      <pc:sldChg chg="addSp delSp modSp add mod">
+        <pc:chgData name="musukie52@gmail.com" userId="017bd91f96aa8751" providerId="LiveId" clId="{5B2C3894-F97E-4CAB-8812-5BB4D83AAC6A}" dt="2026-04-07T06:49:20.582" v="4000" actId="1076"/>
+        <pc:sldMkLst>
+          <pc:docMk/>
+          <pc:sldMk cId="1958167432" sldId="265"/>
+        </pc:sldMkLst>
+        <pc:spChg chg="mod">
+          <ac:chgData name="musukie52@gmail.com" userId="017bd91f96aa8751" providerId="LiveId" clId="{5B2C3894-F97E-4CAB-8812-5BB4D83AAC6A}" dt="2026-04-07T06:30:37.167" v="2188" actId="20577"/>
+          <ac:spMkLst>
+            <pc:docMk/>
+            <pc:sldMk cId="1958167432" sldId="265"/>
+            <ac:spMk id="2" creationId="{2C8F8A44-4E19-0835-A954-84D17E9C8055}"/>
+          </ac:spMkLst>
+        </pc:spChg>
+        <pc:spChg chg="add del">
+          <ac:chgData name="musukie52@gmail.com" userId="017bd91f96aa8751" providerId="LiveId" clId="{5B2C3894-F97E-4CAB-8812-5BB4D83AAC6A}" dt="2026-04-07T06:46:17.564" v="3701" actId="478"/>
+          <ac:spMkLst>
+            <pc:docMk/>
+            <pc:sldMk cId="1958167432" sldId="265"/>
+            <ac:spMk id="3" creationId="{4FFFA229-F9D5-2722-9CBD-A62AC2DDA7D6}"/>
+          </ac:spMkLst>
+        </pc:spChg>
+        <pc:spChg chg="mod">
+          <ac:chgData name="musukie52@gmail.com" userId="017bd91f96aa8751" providerId="LiveId" clId="{5B2C3894-F97E-4CAB-8812-5BB4D83AAC6A}" dt="2026-04-07T06:30:41.185" v="2201" actId="20577"/>
+          <ac:spMkLst>
+            <pc:docMk/>
+            <pc:sldMk cId="1958167432" sldId="265"/>
+            <ac:spMk id="4" creationId="{CEB45F61-20FE-6203-B46B-17C565B55CA2}"/>
+          </ac:spMkLst>
+        </pc:spChg>
+        <pc:spChg chg="add mod">
+          <ac:chgData name="musukie52@gmail.com" userId="017bd91f96aa8751" providerId="LiveId" clId="{5B2C3894-F97E-4CAB-8812-5BB4D83AAC6A}" dt="2026-04-07T06:45:43.943" v="3690"/>
+          <ac:spMkLst>
+            <pc:docMk/>
+            <pc:sldMk cId="1958167432" sldId="265"/>
+            <ac:spMk id="5" creationId="{EBE3E813-44F8-4300-33B4-07C02406AD86}"/>
+          </ac:spMkLst>
+        </pc:spChg>
+        <pc:spChg chg="mod">
+          <ac:chgData name="musukie52@gmail.com" userId="017bd91f96aa8751" providerId="LiveId" clId="{5B2C3894-F97E-4CAB-8812-5BB4D83AAC6A}" dt="2026-04-07T06:45:05.619" v="3680" actId="20577"/>
+          <ac:spMkLst>
+            <pc:docMk/>
+            <pc:sldMk cId="1958167432" sldId="265"/>
+            <ac:spMk id="6" creationId="{9EEC6482-D877-21DA-938F-520C12AC4E3E}"/>
+          </ac:spMkLst>
+        </pc:spChg>
+        <pc:spChg chg="add del">
+          <ac:chgData name="musukie52@gmail.com" userId="017bd91f96aa8751" providerId="LiveId" clId="{5B2C3894-F97E-4CAB-8812-5BB4D83AAC6A}" dt="2026-04-07T06:46:17.564" v="3701" actId="478"/>
+          <ac:spMkLst>
+            <pc:docMk/>
+            <pc:sldMk cId="1958167432" sldId="265"/>
+            <ac:spMk id="7" creationId="{04DA348A-7EE3-4504-D39D-62DF2A273E0E}"/>
+          </ac:spMkLst>
+        </pc:spChg>
+        <pc:spChg chg="add del mod">
+          <ac:chgData name="musukie52@gmail.com" userId="017bd91f96aa8751" providerId="LiveId" clId="{5B2C3894-F97E-4CAB-8812-5BB4D83AAC6A}" dt="2026-04-07T06:46:13.441" v="3700" actId="1076"/>
+          <ac:spMkLst>
+            <pc:docMk/>
+            <pc:sldMk cId="1958167432" sldId="265"/>
+            <ac:spMk id="8" creationId="{EBE3E813-44F8-4300-33B4-07C02406AD86}"/>
+          </ac:spMkLst>
+        </pc:spChg>
+        <pc:spChg chg="add del mod">
+          <ac:chgData name="musukie52@gmail.com" userId="017bd91f96aa8751" providerId="LiveId" clId="{5B2C3894-F97E-4CAB-8812-5BB4D83AAC6A}" dt="2026-04-07T06:46:51.986" v="3754" actId="20577"/>
+          <ac:spMkLst>
+            <pc:docMk/>
+            <pc:sldMk cId="1958167432" sldId="265"/>
+            <ac:spMk id="9" creationId="{A4CB4E8B-9655-CD1A-32C8-AF8DD858C072}"/>
+          </ac:spMkLst>
+        </pc:spChg>
+        <pc:spChg chg="del">
+          <ac:chgData name="musukie52@gmail.com" userId="017bd91f96aa8751" providerId="LiveId" clId="{5B2C3894-F97E-4CAB-8812-5BB4D83AAC6A}" dt="2026-04-07T06:32:37.458" v="2587" actId="478"/>
+          <ac:spMkLst>
+            <pc:docMk/>
+            <pc:sldMk cId="1958167432" sldId="265"/>
+            <ac:spMk id="10" creationId="{5AC41480-29C0-D455-D69E-08857472FEEC}"/>
+          </ac:spMkLst>
+        </pc:spChg>
+        <pc:spChg chg="mod">
+          <ac:chgData name="musukie52@gmail.com" userId="017bd91f96aa8751" providerId="LiveId" clId="{5B2C3894-F97E-4CAB-8812-5BB4D83AAC6A}" dt="2026-04-07T06:49:20.582" v="4000" actId="1076"/>
+          <ac:spMkLst>
+            <pc:docMk/>
+            <pc:sldMk cId="1958167432" sldId="265"/>
+            <ac:spMk id="11" creationId="{49515B72-4FEF-9470-FF61-14A865472CB3}"/>
+          </ac:spMkLst>
+        </pc:spChg>
+        <pc:spChg chg="del">
+          <ac:chgData name="musukie52@gmail.com" userId="017bd91f96aa8751" providerId="LiveId" clId="{5B2C3894-F97E-4CAB-8812-5BB4D83AAC6A}" dt="2026-04-07T06:33:37.093" v="2793" actId="478"/>
+          <ac:spMkLst>
+            <pc:docMk/>
+            <pc:sldMk cId="1958167432" sldId="265"/>
+            <ac:spMk id="12" creationId="{B198586D-1781-8FDD-FAF6-27EB5A4AFD58}"/>
+          </ac:spMkLst>
+        </pc:spChg>
+        <pc:spChg chg="mod">
+          <ac:chgData name="musukie52@gmail.com" userId="017bd91f96aa8751" providerId="LiveId" clId="{5B2C3894-F97E-4CAB-8812-5BB4D83AAC6A}" dt="2026-04-07T06:48:55.105" v="3999" actId="20577"/>
+          <ac:spMkLst>
+            <pc:docMk/>
+            <pc:sldMk cId="1958167432" sldId="265"/>
+            <ac:spMk id="13" creationId="{6722BE7C-D321-EE07-873B-881A054240B2}"/>
+          </ac:spMkLst>
+        </pc:spChg>
+        <pc:spChg chg="add mod">
+          <ac:chgData name="musukie52@gmail.com" userId="017bd91f96aa8751" providerId="LiveId" clId="{5B2C3894-F97E-4CAB-8812-5BB4D83AAC6A}" dt="2026-04-07T06:45:54.339" v="3694"/>
+          <ac:spMkLst>
+            <pc:docMk/>
+            <pc:sldMk cId="1958167432" sldId="265"/>
+            <ac:spMk id="14" creationId="{A4CB4E8B-9655-CD1A-32C8-AF8DD858C072}"/>
+          </ac:spMkLst>
+        </pc:spChg>
+        <pc:spChg chg="del">
+          <ac:chgData name="musukie52@gmail.com" userId="017bd91f96aa8751" providerId="LiveId" clId="{5B2C3894-F97E-4CAB-8812-5BB4D83AAC6A}" dt="2026-04-07T06:33:41.799" v="2795" actId="478"/>
+          <ac:spMkLst>
+            <pc:docMk/>
+            <pc:sldMk cId="1958167432" sldId="265"/>
+            <ac:spMk id="16" creationId="{DA3984B6-3EAF-862D-371D-0ACB83A4202E}"/>
+          </ac:spMkLst>
+        </pc:spChg>
+        <pc:spChg chg="del mod">
+          <ac:chgData name="musukie52@gmail.com" userId="017bd91f96aa8751" providerId="LiveId" clId="{5B2C3894-F97E-4CAB-8812-5BB4D83AAC6A}" dt="2026-04-07T06:37:50.632" v="3362" actId="478"/>
+          <ac:spMkLst>
+            <pc:docMk/>
+            <pc:sldMk cId="1958167432" sldId="265"/>
+            <ac:spMk id="17" creationId="{B12AD9B4-A51F-4E69-6123-E17B58C55436}"/>
+          </ac:spMkLst>
+        </pc:spChg>
+      </pc:sldChg>
+      <pc:sldChg chg="new del">
+        <pc:chgData name="musukie52@gmail.com" userId="017bd91f96aa8751" providerId="LiveId" clId="{5B2C3894-F97E-4CAB-8812-5BB4D83AAC6A}" dt="2026-04-07T06:30:26.398" v="2179" actId="47"/>
+        <pc:sldMkLst>
+          <pc:docMk/>
+          <pc:sldMk cId="4162280882" sldId="265"/>
+        </pc:sldMkLst>
+      </pc:sldChg>
+      <pc:sldChg chg="addSp delSp modSp new mod">
+        <pc:chgData name="musukie52@gmail.com" userId="017bd91f96aa8751" providerId="LiveId" clId="{5B2C3894-F97E-4CAB-8812-5BB4D83AAC6A}" dt="2026-04-07T08:21:37.359" v="4227" actId="20577"/>
+        <pc:sldMkLst>
+          <pc:docMk/>
+          <pc:sldMk cId="3530151398" sldId="266"/>
+        </pc:sldMkLst>
+        <pc:spChg chg="del">
+          <ac:chgData name="musukie52@gmail.com" userId="017bd91f96aa8751" providerId="LiveId" clId="{5B2C3894-F97E-4CAB-8812-5BB4D83AAC6A}" dt="2026-04-07T06:50:15.360" v="4004" actId="478"/>
+          <ac:spMkLst>
+            <pc:docMk/>
+            <pc:sldMk cId="3530151398" sldId="266"/>
+            <ac:spMk id="2" creationId="{A637057E-9738-FFF0-8954-314DDDAB90CD}"/>
+          </ac:spMkLst>
+        </pc:spChg>
+        <pc:spChg chg="del">
+          <ac:chgData name="musukie52@gmail.com" userId="017bd91f96aa8751" providerId="LiveId" clId="{5B2C3894-F97E-4CAB-8812-5BB4D83AAC6A}" dt="2026-04-07T06:50:15.360" v="4004" actId="478"/>
+          <ac:spMkLst>
+            <pc:docMk/>
+            <pc:sldMk cId="3530151398" sldId="266"/>
+            <ac:spMk id="3" creationId="{C3441CCA-7901-DDC7-82CD-56010CFA58A2}"/>
+          </ac:spMkLst>
+        </pc:spChg>
+        <pc:spChg chg="add mod">
+          <ac:chgData name="musukie52@gmail.com" userId="017bd91f96aa8751" providerId="LiveId" clId="{5B2C3894-F97E-4CAB-8812-5BB4D83AAC6A}" dt="2026-04-07T06:50:24.492" v="4040" actId="20577"/>
+          <ac:spMkLst>
+            <pc:docMk/>
+            <pc:sldMk cId="3530151398" sldId="266"/>
+            <ac:spMk id="4" creationId="{E3C49264-198A-B524-7B14-3C9562D61B41}"/>
+          </ac:spMkLst>
+        </pc:spChg>
+        <pc:spChg chg="add mod">
+          <ac:chgData name="musukie52@gmail.com" userId="017bd91f96aa8751" providerId="LiveId" clId="{5B2C3894-F97E-4CAB-8812-5BB4D83AAC6A}" dt="2026-04-07T08:21:37.359" v="4227" actId="20577"/>
+          <ac:spMkLst>
+            <pc:docMk/>
+            <pc:sldMk cId="3530151398" sldId="266"/>
+            <ac:spMk id="5" creationId="{10BFF803-E6D2-79E1-F9E3-4E1E6803B07C}"/>
+          </ac:spMkLst>
+        </pc:spChg>
       </pc:sldChg>
     </pc:docChg>
   </pc:docChgLst>
@@ -3367,10 +3931,15 @@
         </p:nvSpPr>
         <p:spPr/>
         <p:txBody>
-          <a:bodyPr/>
-          <a:lstStyle/>
-          <a:p>
-            <a:endParaRPr lang="ko-KR" altLang="en-US"/>
+          <a:bodyPr>
+            <a:normAutofit/>
+          </a:bodyPr>
+          <a:lstStyle/>
+          <a:p>
+            <a:r>
+              <a:rPr lang="ko-KR" altLang="en-US" sz="3200" dirty="0"/>
+              <a:t>선생님께서 주신 자료를 바탕으로 포트폴리오 만들기</a:t>
+            </a:r>
           </a:p>
         </p:txBody>
       </p:sp>
@@ -3395,7 +3964,101 @@
           <a:bodyPr/>
           <a:lstStyle/>
           <a:p>
-            <a:endParaRPr lang="ko-KR" altLang="en-US"/>
+            <a:r>
+              <a:rPr lang="ko-KR" altLang="en-US" dirty="0"/>
+              <a:t>캐릭터</a:t>
+            </a:r>
+            <a:r>
+              <a:rPr lang="en-US" altLang="ko-KR" dirty="0"/>
+              <a:t>, </a:t>
+            </a:r>
+            <a:r>
+              <a:rPr lang="ko-KR" altLang="en-US" dirty="0"/>
+              <a:t>배경</a:t>
+            </a:r>
+            <a:r>
+              <a:rPr lang="en-US" altLang="ko-KR" dirty="0"/>
+              <a:t>, </a:t>
+            </a:r>
+            <a:r>
+              <a:rPr lang="ko-KR" altLang="en-US" dirty="0"/>
+              <a:t>등장 배경 정보를 글자 정보로 나타낸 것</a:t>
+            </a:r>
+            <a:endParaRPr lang="en-US" altLang="ko-KR" dirty="0"/>
+          </a:p>
+          <a:p>
+            <a:r>
+              <a:rPr lang="ko-KR" altLang="en-US" dirty="0"/>
+              <a:t>시나리오 포트폴리오의 첫 페이지</a:t>
+            </a:r>
+            <a:endParaRPr lang="en-US" altLang="ko-KR" dirty="0"/>
+          </a:p>
+          <a:p>
+            <a:endParaRPr lang="en-US" altLang="ko-KR" dirty="0"/>
+          </a:p>
+          <a:p>
+            <a:r>
+              <a:rPr lang="ko-KR" altLang="en-US" dirty="0"/>
+              <a:t>이런 내용의 글을 기준으로 상황의 </a:t>
+            </a:r>
+            <a:r>
+              <a:rPr lang="ko-KR" altLang="en-US" dirty="0" err="1"/>
+              <a:t>기차칸</a:t>
+            </a:r>
+            <a:r>
+              <a:rPr lang="ko-KR" altLang="en-US" dirty="0"/>
+              <a:t> 만들어보기</a:t>
+            </a:r>
+            <a:endParaRPr lang="en-US" altLang="ko-KR" dirty="0"/>
+          </a:p>
+          <a:p>
+            <a:r>
+              <a:rPr lang="ko-KR" altLang="en-US" dirty="0"/>
+              <a:t>어떤 이야기가 시작돼서 끝나는 지에 대한 상황의 </a:t>
+            </a:r>
+            <a:r>
+              <a:rPr lang="ko-KR" altLang="en-US" dirty="0" err="1"/>
+              <a:t>기차칸을</a:t>
+            </a:r>
+            <a:r>
+              <a:rPr lang="ko-KR" altLang="en-US" dirty="0"/>
+              <a:t> </a:t>
+            </a:r>
+            <a:br>
+              <a:rPr lang="en-US" altLang="ko-KR" dirty="0"/>
+            </a:br>
+            <a:r>
+              <a:rPr lang="ko-KR" altLang="en-US" dirty="0"/>
+              <a:t>스토리의 </a:t>
+            </a:r>
+            <a:r>
+              <a:rPr lang="ko-KR" altLang="en-US" dirty="0" err="1"/>
+              <a:t>내러티브에</a:t>
+            </a:r>
+            <a:r>
+              <a:rPr lang="ko-KR" altLang="en-US" dirty="0"/>
+              <a:t> 맞게 </a:t>
+            </a:r>
+            <a:br>
+              <a:rPr lang="en-US" altLang="ko-KR" dirty="0"/>
+            </a:br>
+            <a:r>
+              <a:rPr lang="ko-KR" altLang="en-US" dirty="0"/>
+              <a:t>도식을 참조해서 더 세련되게</a:t>
+            </a:r>
+            <a:r>
+              <a:rPr lang="en-US" altLang="ko-KR" dirty="0"/>
+              <a:t> </a:t>
+            </a:r>
+            <a:r>
+              <a:rPr lang="ko-KR" altLang="en-US" dirty="0"/>
+              <a:t>만들자</a:t>
+            </a:r>
+            <a:r>
+              <a:rPr lang="en-US" altLang="ko-KR" dirty="0"/>
+              <a:t>.</a:t>
+            </a:r>
+            <a:endParaRPr lang="ko-KR" altLang="en-US" dirty="0"/>
           </a:p>
         </p:txBody>
       </p:sp>
@@ -3403,6 +4066,2674 @@
     <p:extLst>
       <p:ext uri="{BB962C8B-B14F-4D97-AF65-F5344CB8AC3E}">
         <p14:creationId xmlns:p14="http://schemas.microsoft.com/office/powerpoint/2010/main" val="4069274404"/>
+      </p:ext>
+    </p:extLst>
+  </p:cSld>
+  <p:clrMapOvr>
+    <a:masterClrMapping/>
+  </p:clrMapOvr>
+</p:sld>
+</file>
+
+<file path=ppt/slides/slide2.xml><?xml version="1.0" encoding="utf-8"?>
+<p:sld xmlns:a="http://schemas.openxmlformats.org/drawingml/2006/main" xmlns:r="http://schemas.openxmlformats.org/officeDocument/2006/relationships" xmlns:p="http://schemas.openxmlformats.org/presentationml/2006/main">
+  <p:cSld>
+    <p:spTree>
+      <p:nvGrpSpPr>
+        <p:cNvPr id="1" name=""/>
+        <p:cNvGrpSpPr/>
+        <p:nvPr/>
+      </p:nvGrpSpPr>
+      <p:grpSpPr>
+        <a:xfrm>
+          <a:off x="0" y="0"/>
+          <a:ext cx="0" cy="0"/>
+          <a:chOff x="0" y="0"/>
+          <a:chExt cx="0" cy="0"/>
+        </a:xfrm>
+      </p:grpSpPr>
+      <p:sp>
+        <p:nvSpPr>
+          <p:cNvPr id="7" name="사각형: 둥근 모서리 6">
+            <a:extLst>
+              <a:ext uri="{FF2B5EF4-FFF2-40B4-BE49-F238E27FC236}">
+                <a16:creationId xmlns:a16="http://schemas.microsoft.com/office/drawing/2014/main" id="{68518FE7-555E-B523-5BAF-328D10F7BF3F}"/>
+              </a:ext>
+            </a:extLst>
+          </p:cNvPr>
+          <p:cNvSpPr/>
+          <p:nvPr/>
+        </p:nvSpPr>
+        <p:spPr>
+          <a:xfrm>
+            <a:off x="574552" y="574287"/>
+            <a:ext cx="3562549" cy="2854713"/>
+          </a:xfrm>
+          <a:prstGeom prst="roundRect">
+            <a:avLst>
+              <a:gd name="adj" fmla="val 8073"/>
+            </a:avLst>
+          </a:prstGeom>
+          <a:solidFill>
+            <a:srgbClr val="7C3B81">
+              <a:alpha val="50000"/>
+            </a:srgbClr>
+          </a:solidFill>
+          <a:ln>
+            <a:noFill/>
+          </a:ln>
+        </p:spPr>
+        <p:style>
+          <a:lnRef idx="2">
+            <a:schemeClr val="accent1">
+              <a:shade val="15000"/>
+            </a:schemeClr>
+          </a:lnRef>
+          <a:fillRef idx="1">
+            <a:schemeClr val="accent1"/>
+          </a:fillRef>
+          <a:effectRef idx="0">
+            <a:schemeClr val="accent1"/>
+          </a:effectRef>
+          <a:fontRef idx="minor">
+            <a:schemeClr val="lt1"/>
+          </a:fontRef>
+        </p:style>
+        <p:txBody>
+          <a:bodyPr rtlCol="0" anchor="ctr"/>
+          <a:lstStyle/>
+          <a:p>
+            <a:pPr algn="ctr"/>
+            <a:endParaRPr lang="ko-KR" altLang="en-US" dirty="0"/>
+          </a:p>
+        </p:txBody>
+      </p:sp>
+      <p:sp>
+        <p:nvSpPr>
+          <p:cNvPr id="4" name="TextBox 3">
+            <a:extLst>
+              <a:ext uri="{FF2B5EF4-FFF2-40B4-BE49-F238E27FC236}">
+                <a16:creationId xmlns:a16="http://schemas.microsoft.com/office/drawing/2014/main" id="{CAADB74E-2015-DFDE-C1AF-9BD23B3BE15F}"/>
+              </a:ext>
+            </a:extLst>
+          </p:cNvPr>
+          <p:cNvSpPr txBox="1"/>
+          <p:nvPr/>
+        </p:nvSpPr>
+        <p:spPr>
+          <a:xfrm>
+            <a:off x="762973" y="1603662"/>
+            <a:ext cx="2917372" cy="323165"/>
+          </a:xfrm>
+          <a:prstGeom prst="rect">
+            <a:avLst/>
+          </a:prstGeom>
+          <a:noFill/>
+        </p:spPr>
+        <p:txBody>
+          <a:bodyPr wrap="square" rtlCol="0">
+            <a:spAutoFit/>
+          </a:bodyPr>
+          <a:lstStyle/>
+          <a:p>
+            <a:r>
+              <a:rPr lang="en-US" altLang="ko-KR" sz="1500" b="1" dirty="0"/>
+              <a:t>&lt;</a:t>
+            </a:r>
+            <a:r>
+              <a:rPr lang="ko-KR" altLang="en-US" sz="1500" b="1" dirty="0"/>
+              <a:t>넌 착해 </a:t>
+            </a:r>
+            <a:r>
+              <a:rPr lang="en-US" altLang="ko-KR" sz="1500" b="1" dirty="0"/>
+              <a:t>!&gt;</a:t>
+            </a:r>
+            <a:endParaRPr lang="ko-KR" altLang="en-US" sz="1500" b="1" dirty="0"/>
+          </a:p>
+        </p:txBody>
+      </p:sp>
+      <p:sp>
+        <p:nvSpPr>
+          <p:cNvPr id="5" name="TextBox 4">
+            <a:extLst>
+              <a:ext uri="{FF2B5EF4-FFF2-40B4-BE49-F238E27FC236}">
+                <a16:creationId xmlns:a16="http://schemas.microsoft.com/office/drawing/2014/main" id="{F61E0317-7753-A315-9A46-9DCE2E41C00F}"/>
+              </a:ext>
+            </a:extLst>
+          </p:cNvPr>
+          <p:cNvSpPr txBox="1"/>
+          <p:nvPr/>
+        </p:nvSpPr>
+        <p:spPr>
+          <a:xfrm>
+            <a:off x="897140" y="904737"/>
+            <a:ext cx="2917372" cy="446276"/>
+          </a:xfrm>
+          <a:prstGeom prst="rect">
+            <a:avLst/>
+          </a:prstGeom>
+          <a:noFill/>
+        </p:spPr>
+        <p:txBody>
+          <a:bodyPr wrap="square" rtlCol="0">
+            <a:spAutoFit/>
+          </a:bodyPr>
+          <a:lstStyle/>
+          <a:p>
+            <a:pPr algn="ctr"/>
+            <a:r>
+              <a:rPr lang="ko-KR" altLang="en-US" sz="2300" b="1" dirty="0"/>
+              <a:t>시놉시스</a:t>
+            </a:r>
+          </a:p>
+        </p:txBody>
+      </p:sp>
+      <p:sp>
+        <p:nvSpPr>
+          <p:cNvPr id="6" name="TextBox 5">
+            <a:extLst>
+              <a:ext uri="{FF2B5EF4-FFF2-40B4-BE49-F238E27FC236}">
+                <a16:creationId xmlns:a16="http://schemas.microsoft.com/office/drawing/2014/main" id="{CA87E5B1-F043-D660-8FE9-4B4109970D08}"/>
+              </a:ext>
+            </a:extLst>
+          </p:cNvPr>
+          <p:cNvSpPr txBox="1"/>
+          <p:nvPr/>
+        </p:nvSpPr>
+        <p:spPr>
+          <a:xfrm>
+            <a:off x="762973" y="2131835"/>
+            <a:ext cx="3185705" cy="821379"/>
+          </a:xfrm>
+          <a:prstGeom prst="rect">
+            <a:avLst/>
+          </a:prstGeom>
+          <a:noFill/>
+        </p:spPr>
+        <p:txBody>
+          <a:bodyPr wrap="square" rtlCol="0">
+            <a:spAutoFit/>
+          </a:bodyPr>
+          <a:lstStyle/>
+          <a:p>
+            <a:pPr algn="just">
+              <a:lnSpc>
+                <a:spcPct val="150000"/>
+              </a:lnSpc>
+            </a:pPr>
+            <a:r>
+              <a:rPr lang="ko-KR" altLang="en-US" sz="1100" dirty="0"/>
+              <a:t>끝없는 선의를 지닌 소녀</a:t>
+            </a:r>
+            <a:r>
+              <a:rPr lang="en-US" altLang="ko-KR" sz="1100" dirty="0"/>
+              <a:t>, </a:t>
+            </a:r>
+            <a:r>
+              <a:rPr lang="ko-KR" altLang="en-US" sz="1100" dirty="0" err="1"/>
+              <a:t>차한해</a:t>
+            </a:r>
+            <a:r>
+              <a:rPr lang="en-US" altLang="ko-KR" sz="1100" dirty="0"/>
+              <a:t>.</a:t>
+            </a:r>
+          </a:p>
+          <a:p>
+            <a:pPr algn="just">
+              <a:lnSpc>
+                <a:spcPct val="150000"/>
+              </a:lnSpc>
+            </a:pPr>
+            <a:r>
+              <a:rPr lang="ko-KR" altLang="en-US" sz="1100" dirty="0"/>
+              <a:t>내어줄수록</a:t>
+            </a:r>
+            <a:r>
+              <a:rPr lang="en-US" altLang="ko-KR" sz="1100" dirty="0"/>
+              <a:t>, </a:t>
+            </a:r>
+            <a:r>
+              <a:rPr lang="ko-KR" altLang="en-US" sz="1100" dirty="0"/>
+              <a:t>다른 끝을 마주한다</a:t>
+            </a:r>
+            <a:r>
+              <a:rPr lang="en-US" altLang="ko-KR" sz="1100" dirty="0"/>
+              <a:t>.</a:t>
+            </a:r>
+          </a:p>
+          <a:p>
+            <a:pPr algn="just">
+              <a:lnSpc>
+                <a:spcPct val="150000"/>
+              </a:lnSpc>
+            </a:pPr>
+            <a:r>
+              <a:rPr lang="ko-KR" altLang="en-US" sz="1100" dirty="0"/>
+              <a:t>그 끝은 누구의 선택일까</a:t>
+            </a:r>
+            <a:r>
+              <a:rPr lang="en-US" altLang="ko-KR" sz="1100" dirty="0"/>
+              <a:t>.</a:t>
+            </a:r>
+            <a:endParaRPr lang="ko-KR" altLang="en-US" sz="1100" dirty="0"/>
+          </a:p>
+        </p:txBody>
+      </p:sp>
+      <p:sp>
+        <p:nvSpPr>
+          <p:cNvPr id="8" name="TextBox 7">
+            <a:extLst>
+              <a:ext uri="{FF2B5EF4-FFF2-40B4-BE49-F238E27FC236}">
+                <a16:creationId xmlns:a16="http://schemas.microsoft.com/office/drawing/2014/main" id="{BFB097B4-C35C-70C0-44E8-08DBE50680AA}"/>
+              </a:ext>
+            </a:extLst>
+          </p:cNvPr>
+          <p:cNvSpPr txBox="1"/>
+          <p:nvPr/>
+        </p:nvSpPr>
+        <p:spPr>
+          <a:xfrm>
+            <a:off x="79829" y="-674914"/>
+            <a:ext cx="5334000" cy="369332"/>
+          </a:xfrm>
+          <a:prstGeom prst="rect">
+            <a:avLst/>
+          </a:prstGeom>
+          <a:noFill/>
+        </p:spPr>
+        <p:txBody>
+          <a:bodyPr wrap="square" rtlCol="0">
+            <a:spAutoFit/>
+          </a:bodyPr>
+          <a:lstStyle/>
+          <a:p>
+            <a:r>
+              <a:rPr lang="ko-KR" altLang="en-US" dirty="0"/>
+              <a:t>짧은 시놉시스 버전</a:t>
+            </a:r>
+          </a:p>
+        </p:txBody>
+      </p:sp>
+    </p:spTree>
+    <p:extLst>
+      <p:ext uri="{BB962C8B-B14F-4D97-AF65-F5344CB8AC3E}">
+        <p14:creationId xmlns:p14="http://schemas.microsoft.com/office/powerpoint/2010/main" val="3352289676"/>
+      </p:ext>
+    </p:extLst>
+  </p:cSld>
+  <p:clrMapOvr>
+    <a:masterClrMapping/>
+  </p:clrMapOvr>
+</p:sld>
+</file>
+
+<file path=ppt/slides/slide3.xml><?xml version="1.0" encoding="utf-8"?>
+<p:sld xmlns:a="http://schemas.openxmlformats.org/drawingml/2006/main" xmlns:r="http://schemas.openxmlformats.org/officeDocument/2006/relationships" xmlns:p="http://schemas.openxmlformats.org/presentationml/2006/main">
+  <p:cSld>
+    <p:spTree>
+      <p:nvGrpSpPr>
+        <p:cNvPr id="1" name=""/>
+        <p:cNvGrpSpPr/>
+        <p:nvPr/>
+      </p:nvGrpSpPr>
+      <p:grpSpPr>
+        <a:xfrm>
+          <a:off x="0" y="0"/>
+          <a:ext cx="0" cy="0"/>
+          <a:chOff x="0" y="0"/>
+          <a:chExt cx="0" cy="0"/>
+        </a:xfrm>
+      </p:grpSpPr>
+      <p:sp>
+        <p:nvSpPr>
+          <p:cNvPr id="4" name="TextBox 3">
+            <a:extLst>
+              <a:ext uri="{FF2B5EF4-FFF2-40B4-BE49-F238E27FC236}">
+                <a16:creationId xmlns:a16="http://schemas.microsoft.com/office/drawing/2014/main" id="{2C59E438-06EB-B20B-130D-85B97904DCB1}"/>
+              </a:ext>
+            </a:extLst>
+          </p:cNvPr>
+          <p:cNvSpPr txBox="1"/>
+          <p:nvPr/>
+        </p:nvSpPr>
+        <p:spPr>
+          <a:xfrm>
+            <a:off x="79829" y="-674914"/>
+            <a:ext cx="5334000" cy="369332"/>
+          </a:xfrm>
+          <a:prstGeom prst="rect">
+            <a:avLst/>
+          </a:prstGeom>
+          <a:noFill/>
+        </p:spPr>
+        <p:txBody>
+          <a:bodyPr wrap="square" rtlCol="0">
+            <a:spAutoFit/>
+          </a:bodyPr>
+          <a:lstStyle/>
+          <a:p>
+            <a:r>
+              <a:rPr lang="ko-KR" altLang="en-US" dirty="0"/>
+              <a:t>긴 시놉시스 버전</a:t>
+            </a:r>
+          </a:p>
+        </p:txBody>
+      </p:sp>
+      <p:sp>
+        <p:nvSpPr>
+          <p:cNvPr id="5" name="TextBox 4">
+            <a:extLst>
+              <a:ext uri="{FF2B5EF4-FFF2-40B4-BE49-F238E27FC236}">
+                <a16:creationId xmlns:a16="http://schemas.microsoft.com/office/drawing/2014/main" id="{E1B6CE70-439D-E6CE-3C7B-A12211E6A532}"/>
+              </a:ext>
+            </a:extLst>
+          </p:cNvPr>
+          <p:cNvSpPr txBox="1"/>
+          <p:nvPr/>
+        </p:nvSpPr>
+        <p:spPr>
+          <a:xfrm>
+            <a:off x="762973" y="1603662"/>
+            <a:ext cx="2917372" cy="323165"/>
+          </a:xfrm>
+          <a:prstGeom prst="rect">
+            <a:avLst/>
+          </a:prstGeom>
+          <a:noFill/>
+        </p:spPr>
+        <p:txBody>
+          <a:bodyPr wrap="square" rtlCol="0">
+            <a:spAutoFit/>
+          </a:bodyPr>
+          <a:lstStyle/>
+          <a:p>
+            <a:r>
+              <a:rPr lang="en-US" altLang="ko-KR" sz="1500" b="1" dirty="0"/>
+              <a:t>&lt;</a:t>
+            </a:r>
+            <a:r>
+              <a:rPr lang="ko-KR" altLang="en-US" sz="1500" b="1" dirty="0"/>
+              <a:t>넌 착해 </a:t>
+            </a:r>
+            <a:r>
+              <a:rPr lang="en-US" altLang="ko-KR" sz="1500" b="1" dirty="0"/>
+              <a:t>!&gt;</a:t>
+            </a:r>
+            <a:endParaRPr lang="ko-KR" altLang="en-US" sz="1500" b="1" dirty="0"/>
+          </a:p>
+        </p:txBody>
+      </p:sp>
+      <p:sp>
+        <p:nvSpPr>
+          <p:cNvPr id="6" name="TextBox 5">
+            <a:extLst>
+              <a:ext uri="{FF2B5EF4-FFF2-40B4-BE49-F238E27FC236}">
+                <a16:creationId xmlns:a16="http://schemas.microsoft.com/office/drawing/2014/main" id="{67A91678-B678-0A59-8FD3-AEEBF6959284}"/>
+              </a:ext>
+            </a:extLst>
+          </p:cNvPr>
+          <p:cNvSpPr txBox="1"/>
+          <p:nvPr/>
+        </p:nvSpPr>
+        <p:spPr>
+          <a:xfrm>
+            <a:off x="762973" y="645383"/>
+            <a:ext cx="2917372" cy="446276"/>
+          </a:xfrm>
+          <a:prstGeom prst="rect">
+            <a:avLst/>
+          </a:prstGeom>
+          <a:noFill/>
+        </p:spPr>
+        <p:txBody>
+          <a:bodyPr wrap="square" rtlCol="0">
+            <a:spAutoFit/>
+          </a:bodyPr>
+          <a:lstStyle/>
+          <a:p>
+            <a:pPr algn="just"/>
+            <a:r>
+              <a:rPr lang="ko-KR" altLang="en-US" sz="2300" b="1" dirty="0"/>
+              <a:t>시놉시스</a:t>
+            </a:r>
+          </a:p>
+        </p:txBody>
+      </p:sp>
+      <p:sp>
+        <p:nvSpPr>
+          <p:cNvPr id="7" name="TextBox 6">
+            <a:extLst>
+              <a:ext uri="{FF2B5EF4-FFF2-40B4-BE49-F238E27FC236}">
+                <a16:creationId xmlns:a16="http://schemas.microsoft.com/office/drawing/2014/main" id="{066780F0-DF5C-E9E7-D48A-F10C0DEE3839}"/>
+              </a:ext>
+            </a:extLst>
+          </p:cNvPr>
+          <p:cNvSpPr txBox="1"/>
+          <p:nvPr/>
+        </p:nvSpPr>
+        <p:spPr>
+          <a:xfrm>
+            <a:off x="762973" y="2042625"/>
+            <a:ext cx="8068793" cy="4376198"/>
+          </a:xfrm>
+          <a:prstGeom prst="rect">
+            <a:avLst/>
+          </a:prstGeom>
+          <a:noFill/>
+        </p:spPr>
+        <p:txBody>
+          <a:bodyPr wrap="square" rtlCol="0">
+            <a:spAutoFit/>
+          </a:bodyPr>
+          <a:lstStyle/>
+          <a:p>
+            <a:pPr>
+              <a:lnSpc>
+                <a:spcPct val="150000"/>
+              </a:lnSpc>
+            </a:pPr>
+            <a:r>
+              <a:rPr lang="ko-KR" altLang="en-US" sz="1100" dirty="0"/>
+              <a:t>사람들의 이기심과 외면이 쌓인 자리에 도덕 균열이 생기고</a:t>
+            </a:r>
+            <a:r>
+              <a:rPr lang="en-US" altLang="ko-KR" sz="1100" dirty="0"/>
+              <a:t>,</a:t>
+            </a:r>
+            <a:br>
+              <a:rPr lang="en-US" altLang="ko-KR" sz="1100" dirty="0"/>
+            </a:br>
+            <a:r>
+              <a:rPr lang="ko-KR" altLang="en-US" sz="1100" dirty="0"/>
+              <a:t>그 틈에서 뒤틀린 인간성이 괴물로 태어난다</a:t>
+            </a:r>
+            <a:r>
+              <a:rPr lang="en-US" altLang="ko-KR" sz="1100" dirty="0"/>
+              <a:t>.</a:t>
+            </a:r>
+          </a:p>
+          <a:p>
+            <a:pPr>
+              <a:lnSpc>
+                <a:spcPct val="150000"/>
+              </a:lnSpc>
+            </a:pPr>
+            <a:endParaRPr lang="en-US" altLang="ko-KR" sz="1100" dirty="0"/>
+          </a:p>
+          <a:p>
+            <a:pPr>
+              <a:lnSpc>
+                <a:spcPct val="150000"/>
+              </a:lnSpc>
+            </a:pPr>
+            <a:r>
+              <a:rPr lang="ko-KR" altLang="en-US" sz="1100" dirty="0"/>
+              <a:t>이 괴물을 막을 수 있는 건 오직 인간의 선의뿐</a:t>
+            </a:r>
+            <a:r>
+              <a:rPr lang="en-US" altLang="ko-KR" sz="1100" dirty="0"/>
+              <a:t>.</a:t>
+            </a:r>
+            <a:br>
+              <a:rPr lang="en-US" altLang="ko-KR" sz="1100" dirty="0"/>
+            </a:br>
+            <a:r>
+              <a:rPr lang="ko-KR" altLang="en-US" sz="1100" dirty="0"/>
+              <a:t>하지만 그 선의는</a:t>
+            </a:r>
+            <a:r>
+              <a:rPr lang="en-US" altLang="ko-KR" sz="1100" dirty="0"/>
+              <a:t>, </a:t>
+            </a:r>
+            <a:r>
+              <a:rPr lang="ko-KR" altLang="en-US" sz="1100" dirty="0"/>
+              <a:t>누구나 결국 바닥난다</a:t>
+            </a:r>
+            <a:r>
+              <a:rPr lang="en-US" altLang="ko-KR" sz="1100" dirty="0"/>
+              <a:t>.</a:t>
+            </a:r>
+          </a:p>
+          <a:p>
+            <a:pPr>
+              <a:lnSpc>
+                <a:spcPct val="150000"/>
+              </a:lnSpc>
+            </a:pPr>
+            <a:endParaRPr lang="en-US" altLang="ko-KR" sz="1100" dirty="0"/>
+          </a:p>
+          <a:p>
+            <a:pPr>
+              <a:lnSpc>
+                <a:spcPct val="150000"/>
+              </a:lnSpc>
+            </a:pPr>
+            <a:r>
+              <a:rPr lang="ko-KR" altLang="en-US" sz="1100" dirty="0"/>
+              <a:t>단 한 사람</a:t>
+            </a:r>
+            <a:r>
+              <a:rPr lang="en-US" altLang="ko-KR" sz="1100" dirty="0"/>
+              <a:t>, </a:t>
+            </a:r>
+            <a:r>
+              <a:rPr lang="ko-KR" altLang="en-US" sz="1100" dirty="0"/>
+              <a:t>끝없는 선의를 가진 소녀 차한해를 제외하고</a:t>
+            </a:r>
+            <a:r>
+              <a:rPr lang="en-US" altLang="ko-KR" sz="1100" dirty="0"/>
+              <a:t>.</a:t>
+            </a:r>
+          </a:p>
+          <a:p>
+            <a:pPr>
+              <a:lnSpc>
+                <a:spcPct val="150000"/>
+              </a:lnSpc>
+            </a:pPr>
+            <a:endParaRPr lang="en-US" altLang="ko-KR" sz="1100" dirty="0"/>
+          </a:p>
+          <a:p>
+            <a:pPr>
+              <a:lnSpc>
+                <a:spcPct val="150000"/>
+              </a:lnSpc>
+            </a:pPr>
+            <a:r>
+              <a:rPr lang="ko-KR" altLang="en-US" sz="1100" dirty="0"/>
+              <a:t>처음엔 모두가 그녀에게 감사했다</a:t>
+            </a:r>
+            <a:r>
+              <a:rPr lang="en-US" altLang="ko-KR" sz="1100" dirty="0"/>
+              <a:t>.</a:t>
+            </a:r>
+            <a:br>
+              <a:rPr lang="en-US" altLang="ko-KR" sz="1100" dirty="0"/>
+            </a:br>
+            <a:r>
+              <a:rPr lang="ko-KR" altLang="en-US" sz="1100" dirty="0"/>
+              <a:t>하지만 곧</a:t>
+            </a:r>
+            <a:r>
+              <a:rPr lang="en-US" altLang="ko-KR" sz="1100" dirty="0"/>
+              <a:t>, </a:t>
+            </a:r>
+            <a:r>
+              <a:rPr lang="ko-KR" altLang="en-US" sz="1100" dirty="0"/>
+              <a:t>그녀가 할 수 있다는 사실이 더 </a:t>
+            </a:r>
+            <a:r>
+              <a:rPr lang="ko-KR" altLang="en-US" sz="1100" dirty="0" err="1"/>
+              <a:t>중요해졌다</a:t>
+            </a:r>
+            <a:r>
+              <a:rPr lang="en-US" altLang="ko-KR" sz="1100" dirty="0"/>
+              <a:t>.</a:t>
+            </a:r>
+          </a:p>
+          <a:p>
+            <a:pPr>
+              <a:lnSpc>
+                <a:spcPct val="150000"/>
+              </a:lnSpc>
+            </a:pPr>
+            <a:endParaRPr lang="en-US" altLang="ko-KR" sz="1100" dirty="0"/>
+          </a:p>
+          <a:p>
+            <a:pPr>
+              <a:lnSpc>
+                <a:spcPct val="150000"/>
+              </a:lnSpc>
+            </a:pPr>
+            <a:r>
+              <a:rPr lang="ko-KR" altLang="en-US" sz="1100" dirty="0"/>
+              <a:t>부탁은 의무가 되고</a:t>
+            </a:r>
+            <a:r>
+              <a:rPr lang="en-US" altLang="ko-KR" sz="1100" dirty="0"/>
+              <a:t>, </a:t>
+            </a:r>
+            <a:r>
+              <a:rPr lang="ko-KR" altLang="en-US" sz="1100" dirty="0"/>
+              <a:t>선의는 점점 더 큰 희생을 요구한다</a:t>
+            </a:r>
+            <a:r>
+              <a:rPr lang="en-US" altLang="ko-KR" sz="1100" dirty="0"/>
+              <a:t>.</a:t>
+            </a:r>
+          </a:p>
+          <a:p>
+            <a:pPr>
+              <a:lnSpc>
+                <a:spcPct val="150000"/>
+              </a:lnSpc>
+            </a:pPr>
+            <a:r>
+              <a:rPr lang="ko-KR" altLang="en-US" sz="1100" dirty="0"/>
+              <a:t>세상을 구하기 위해</a:t>
+            </a:r>
+            <a:r>
+              <a:rPr lang="en-US" altLang="ko-KR" sz="1100" dirty="0"/>
+              <a:t>, </a:t>
+            </a:r>
+            <a:r>
+              <a:rPr lang="ko-KR" altLang="en-US" sz="1100" dirty="0"/>
+              <a:t>한 사람은 어디까지 소비될 수 있는가</a:t>
+            </a:r>
+            <a:r>
+              <a:rPr lang="en-US" altLang="ko-KR" sz="1100" dirty="0"/>
+              <a:t>.</a:t>
+            </a:r>
+          </a:p>
+          <a:p>
+            <a:pPr>
+              <a:lnSpc>
+                <a:spcPct val="150000"/>
+              </a:lnSpc>
+            </a:pPr>
+            <a:endParaRPr lang="en-US" altLang="ko-KR" sz="1100" dirty="0"/>
+          </a:p>
+          <a:p>
+            <a:pPr>
+              <a:lnSpc>
+                <a:spcPct val="150000"/>
+              </a:lnSpc>
+            </a:pPr>
+            <a:r>
+              <a:rPr lang="ko-KR" altLang="en-US" sz="1100" dirty="0"/>
+              <a:t>오늘도 결국</a:t>
+            </a:r>
+            <a:r>
+              <a:rPr lang="en-US" altLang="ko-KR" sz="1100" dirty="0"/>
+              <a:t>,</a:t>
+            </a:r>
+            <a:br>
+              <a:rPr lang="en-US" altLang="ko-KR" sz="1100" dirty="0"/>
+            </a:br>
+            <a:r>
+              <a:rPr lang="ko-KR" altLang="en-US" sz="1100" dirty="0"/>
+              <a:t>가장 착한 사람이 </a:t>
+            </a:r>
+            <a:r>
+              <a:rPr lang="ko-KR" altLang="en-US" sz="1100" dirty="0" err="1"/>
+              <a:t>괴물에게로</a:t>
+            </a:r>
+            <a:r>
+              <a:rPr lang="ko-KR" altLang="en-US" sz="1100" dirty="0"/>
+              <a:t> 향한다</a:t>
+            </a:r>
+            <a:r>
+              <a:rPr lang="en-US" altLang="ko-KR" sz="1100" dirty="0"/>
+              <a:t>.</a:t>
+            </a:r>
+          </a:p>
+          <a:p>
+            <a:pPr>
+              <a:lnSpc>
+                <a:spcPct val="150000"/>
+              </a:lnSpc>
+            </a:pPr>
+            <a:endParaRPr lang="ko-KR" altLang="en-US" sz="1100" dirty="0"/>
+          </a:p>
+        </p:txBody>
+      </p:sp>
+    </p:spTree>
+    <p:extLst>
+      <p:ext uri="{BB962C8B-B14F-4D97-AF65-F5344CB8AC3E}">
+        <p14:creationId xmlns:p14="http://schemas.microsoft.com/office/powerpoint/2010/main" val="784013904"/>
+      </p:ext>
+    </p:extLst>
+  </p:cSld>
+  <p:clrMapOvr>
+    <a:masterClrMapping/>
+  </p:clrMapOvr>
+</p:sld>
+</file>
+
+<file path=ppt/slides/slide4.xml><?xml version="1.0" encoding="utf-8"?>
+<p:sld xmlns:a="http://schemas.openxmlformats.org/drawingml/2006/main" xmlns:r="http://schemas.openxmlformats.org/officeDocument/2006/relationships" xmlns:p="http://schemas.openxmlformats.org/presentationml/2006/main">
+  <p:cSld>
+    <p:spTree>
+      <p:nvGrpSpPr>
+        <p:cNvPr id="1" name="">
+          <a:extLst>
+            <a:ext uri="{FF2B5EF4-FFF2-40B4-BE49-F238E27FC236}">
+              <a16:creationId xmlns:a16="http://schemas.microsoft.com/office/drawing/2014/main" id="{436A2424-EA02-8EEF-FAD5-3AB6919CCDEB}"/>
+            </a:ext>
+          </a:extLst>
+        </p:cNvPr>
+        <p:cNvGrpSpPr/>
+        <p:nvPr/>
+      </p:nvGrpSpPr>
+      <p:grpSpPr>
+        <a:xfrm>
+          <a:off x="0" y="0"/>
+          <a:ext cx="0" cy="0"/>
+          <a:chOff x="0" y="0"/>
+          <a:chExt cx="0" cy="0"/>
+        </a:xfrm>
+      </p:grpSpPr>
+      <p:sp>
+        <p:nvSpPr>
+          <p:cNvPr id="4" name="TextBox 3">
+            <a:extLst>
+              <a:ext uri="{FF2B5EF4-FFF2-40B4-BE49-F238E27FC236}">
+                <a16:creationId xmlns:a16="http://schemas.microsoft.com/office/drawing/2014/main" id="{0DB03D72-AC30-B811-B55F-A05913C308B9}"/>
+              </a:ext>
+            </a:extLst>
+          </p:cNvPr>
+          <p:cNvSpPr txBox="1"/>
+          <p:nvPr/>
+        </p:nvSpPr>
+        <p:spPr>
+          <a:xfrm>
+            <a:off x="762973" y="1603662"/>
+            <a:ext cx="2917372" cy="323165"/>
+          </a:xfrm>
+          <a:prstGeom prst="rect">
+            <a:avLst/>
+          </a:prstGeom>
+          <a:noFill/>
+        </p:spPr>
+        <p:txBody>
+          <a:bodyPr wrap="square" rtlCol="0">
+            <a:spAutoFit/>
+          </a:bodyPr>
+          <a:lstStyle/>
+          <a:p>
+            <a:r>
+              <a:rPr lang="en-US" altLang="ko-KR" sz="1500" b="1" dirty="0"/>
+              <a:t>&lt;</a:t>
+            </a:r>
+            <a:r>
+              <a:rPr lang="ko-KR" altLang="en-US" sz="1500" b="1" dirty="0"/>
+              <a:t>넌 착해 </a:t>
+            </a:r>
+            <a:r>
+              <a:rPr lang="en-US" altLang="ko-KR" sz="1500" b="1" dirty="0"/>
+              <a:t>!&gt;</a:t>
+            </a:r>
+            <a:endParaRPr lang="ko-KR" altLang="en-US" sz="1500" b="1" dirty="0"/>
+          </a:p>
+        </p:txBody>
+      </p:sp>
+      <p:sp>
+        <p:nvSpPr>
+          <p:cNvPr id="6" name="TextBox 5">
+            <a:extLst>
+              <a:ext uri="{FF2B5EF4-FFF2-40B4-BE49-F238E27FC236}">
+                <a16:creationId xmlns:a16="http://schemas.microsoft.com/office/drawing/2014/main" id="{0C1BBB87-FF21-7A8D-8E80-BA7D6F1AD8CD}"/>
+              </a:ext>
+            </a:extLst>
+          </p:cNvPr>
+          <p:cNvSpPr txBox="1"/>
+          <p:nvPr/>
+        </p:nvSpPr>
+        <p:spPr>
+          <a:xfrm>
+            <a:off x="762973" y="2042625"/>
+            <a:ext cx="3185705" cy="821379"/>
+          </a:xfrm>
+          <a:prstGeom prst="rect">
+            <a:avLst/>
+          </a:prstGeom>
+          <a:noFill/>
+        </p:spPr>
+        <p:txBody>
+          <a:bodyPr wrap="square" rtlCol="0">
+            <a:spAutoFit/>
+          </a:bodyPr>
+          <a:lstStyle/>
+          <a:p>
+            <a:pPr algn="just">
+              <a:lnSpc>
+                <a:spcPct val="150000"/>
+              </a:lnSpc>
+            </a:pPr>
+            <a:r>
+              <a:rPr lang="ko-KR" altLang="en-US" sz="1100" dirty="0"/>
+              <a:t>끝없는 선의를 지닌 소녀</a:t>
+            </a:r>
+            <a:r>
+              <a:rPr lang="en-US" altLang="ko-KR" sz="1100" dirty="0"/>
+              <a:t>, </a:t>
+            </a:r>
+            <a:r>
+              <a:rPr lang="ko-KR" altLang="en-US" sz="1100" dirty="0" err="1"/>
+              <a:t>차한해</a:t>
+            </a:r>
+            <a:r>
+              <a:rPr lang="en-US" altLang="ko-KR" sz="1100" dirty="0"/>
+              <a:t>.</a:t>
+            </a:r>
+          </a:p>
+          <a:p>
+            <a:pPr algn="just">
+              <a:lnSpc>
+                <a:spcPct val="150000"/>
+              </a:lnSpc>
+            </a:pPr>
+            <a:r>
+              <a:rPr lang="ko-KR" altLang="en-US" sz="1100" dirty="0"/>
+              <a:t>내어줄수록</a:t>
+            </a:r>
+            <a:r>
+              <a:rPr lang="en-US" altLang="ko-KR" sz="1100" dirty="0"/>
+              <a:t>, </a:t>
+            </a:r>
+            <a:r>
+              <a:rPr lang="ko-KR" altLang="en-US" sz="1100" dirty="0"/>
+              <a:t>다른 끝을 마주한다</a:t>
+            </a:r>
+            <a:r>
+              <a:rPr lang="en-US" altLang="ko-KR" sz="1100" dirty="0"/>
+              <a:t>.</a:t>
+            </a:r>
+          </a:p>
+          <a:p>
+            <a:pPr algn="just">
+              <a:lnSpc>
+                <a:spcPct val="150000"/>
+              </a:lnSpc>
+            </a:pPr>
+            <a:r>
+              <a:rPr lang="ko-KR" altLang="en-US" sz="1100" dirty="0"/>
+              <a:t>그 끝은 누구의 선택일까</a:t>
+            </a:r>
+            <a:r>
+              <a:rPr lang="en-US" altLang="ko-KR" sz="1100" dirty="0"/>
+              <a:t>.</a:t>
+            </a:r>
+            <a:endParaRPr lang="ko-KR" altLang="en-US" sz="1100" dirty="0"/>
+          </a:p>
+        </p:txBody>
+      </p:sp>
+      <p:sp>
+        <p:nvSpPr>
+          <p:cNvPr id="2" name="TextBox 1">
+            <a:extLst>
+              <a:ext uri="{FF2B5EF4-FFF2-40B4-BE49-F238E27FC236}">
+                <a16:creationId xmlns:a16="http://schemas.microsoft.com/office/drawing/2014/main" id="{0BF35095-BE47-CD39-F629-CB9CE5245480}"/>
+              </a:ext>
+            </a:extLst>
+          </p:cNvPr>
+          <p:cNvSpPr txBox="1"/>
+          <p:nvPr/>
+        </p:nvSpPr>
+        <p:spPr>
+          <a:xfrm>
+            <a:off x="79829" y="-674914"/>
+            <a:ext cx="5334000" cy="369332"/>
+          </a:xfrm>
+          <a:prstGeom prst="rect">
+            <a:avLst/>
+          </a:prstGeom>
+          <a:noFill/>
+        </p:spPr>
+        <p:txBody>
+          <a:bodyPr wrap="square" rtlCol="0">
+            <a:spAutoFit/>
+          </a:bodyPr>
+          <a:lstStyle/>
+          <a:p>
+            <a:r>
+              <a:rPr lang="ko-KR" altLang="en-US" dirty="0"/>
+              <a:t>짧은 시놉시스 버전</a:t>
+            </a:r>
+          </a:p>
+        </p:txBody>
+      </p:sp>
+      <p:sp>
+        <p:nvSpPr>
+          <p:cNvPr id="3" name="TextBox 2">
+            <a:extLst>
+              <a:ext uri="{FF2B5EF4-FFF2-40B4-BE49-F238E27FC236}">
+                <a16:creationId xmlns:a16="http://schemas.microsoft.com/office/drawing/2014/main" id="{DD83226E-C3CA-58C1-CC94-87ECCABF4E4B}"/>
+              </a:ext>
+            </a:extLst>
+          </p:cNvPr>
+          <p:cNvSpPr txBox="1"/>
+          <p:nvPr/>
+        </p:nvSpPr>
+        <p:spPr>
+          <a:xfrm>
+            <a:off x="762972" y="645383"/>
+            <a:ext cx="8682111" cy="446276"/>
+          </a:xfrm>
+          <a:prstGeom prst="rect">
+            <a:avLst/>
+          </a:prstGeom>
+          <a:noFill/>
+        </p:spPr>
+        <p:txBody>
+          <a:bodyPr wrap="square" rtlCol="0">
+            <a:spAutoFit/>
+          </a:bodyPr>
+          <a:lstStyle/>
+          <a:p>
+            <a:pPr algn="just"/>
+            <a:r>
+              <a:rPr lang="ko-KR" altLang="en-US" sz="2300" b="1" dirty="0"/>
+              <a:t>시놉시스 </a:t>
+            </a:r>
+            <a:r>
+              <a:rPr lang="en-US" altLang="ko-KR" sz="2300" b="1" dirty="0"/>
+              <a:t>– “</a:t>
+            </a:r>
+            <a:r>
+              <a:rPr lang="ko-KR" altLang="en-US" sz="2300" b="1" dirty="0"/>
+              <a:t>모두를 구하기 위해</a:t>
+            </a:r>
+            <a:r>
+              <a:rPr lang="en-US" altLang="ko-KR" sz="2300" b="1" dirty="0"/>
+              <a:t>, </a:t>
+            </a:r>
+            <a:r>
+              <a:rPr lang="ko-KR" altLang="en-US" sz="2300" b="1" dirty="0"/>
+              <a:t>한 사람마나 소모되는 세계</a:t>
+            </a:r>
+            <a:r>
+              <a:rPr lang="en-US" altLang="ko-KR" sz="2300" b="1" dirty="0"/>
+              <a:t>”</a:t>
+            </a:r>
+            <a:endParaRPr lang="ko-KR" altLang="en-US" sz="2300" b="1" dirty="0"/>
+          </a:p>
+        </p:txBody>
+      </p:sp>
+    </p:spTree>
+    <p:extLst>
+      <p:ext uri="{BB962C8B-B14F-4D97-AF65-F5344CB8AC3E}">
+        <p14:creationId xmlns:p14="http://schemas.microsoft.com/office/powerpoint/2010/main" val="3467996113"/>
+      </p:ext>
+    </p:extLst>
+  </p:cSld>
+  <p:clrMapOvr>
+    <a:masterClrMapping/>
+  </p:clrMapOvr>
+</p:sld>
+</file>
+
+<file path=ppt/slides/slide5.xml><?xml version="1.0" encoding="utf-8"?>
+<p:sld xmlns:a="http://schemas.openxmlformats.org/drawingml/2006/main" xmlns:r="http://schemas.openxmlformats.org/officeDocument/2006/relationships" xmlns:p="http://schemas.openxmlformats.org/presentationml/2006/main">
+  <p:cSld>
+    <p:spTree>
+      <p:nvGrpSpPr>
+        <p:cNvPr id="1" name="">
+          <a:extLst>
+            <a:ext uri="{FF2B5EF4-FFF2-40B4-BE49-F238E27FC236}">
+              <a16:creationId xmlns:a16="http://schemas.microsoft.com/office/drawing/2014/main" id="{1A1AF1DF-3E70-1526-9E24-5D4EF908EB1B}"/>
+            </a:ext>
+          </a:extLst>
+        </p:cNvPr>
+        <p:cNvGrpSpPr/>
+        <p:nvPr/>
+      </p:nvGrpSpPr>
+      <p:grpSpPr>
+        <a:xfrm>
+          <a:off x="0" y="0"/>
+          <a:ext cx="0" cy="0"/>
+          <a:chOff x="0" y="0"/>
+          <a:chExt cx="0" cy="0"/>
+        </a:xfrm>
+      </p:grpSpPr>
+      <p:sp>
+        <p:nvSpPr>
+          <p:cNvPr id="4" name="TextBox 3">
+            <a:extLst>
+              <a:ext uri="{FF2B5EF4-FFF2-40B4-BE49-F238E27FC236}">
+                <a16:creationId xmlns:a16="http://schemas.microsoft.com/office/drawing/2014/main" id="{58871343-58B9-D2F9-825C-C584B6B1DFE4}"/>
+              </a:ext>
+            </a:extLst>
+          </p:cNvPr>
+          <p:cNvSpPr txBox="1"/>
+          <p:nvPr/>
+        </p:nvSpPr>
+        <p:spPr>
+          <a:xfrm>
+            <a:off x="762973" y="1603662"/>
+            <a:ext cx="2917372" cy="323165"/>
+          </a:xfrm>
+          <a:prstGeom prst="rect">
+            <a:avLst/>
+          </a:prstGeom>
+          <a:noFill/>
+        </p:spPr>
+        <p:txBody>
+          <a:bodyPr wrap="square" rtlCol="0">
+            <a:spAutoFit/>
+          </a:bodyPr>
+          <a:lstStyle/>
+          <a:p>
+            <a:r>
+              <a:rPr lang="ko-KR" altLang="en-US" sz="1500" b="1" dirty="0" err="1"/>
+              <a:t>차한해</a:t>
+            </a:r>
+            <a:r>
+              <a:rPr lang="ko-KR" altLang="en-US" sz="1500" b="1" dirty="0"/>
+              <a:t> </a:t>
+            </a:r>
+            <a:r>
+              <a:rPr lang="en-US" altLang="ko-KR" sz="1500" b="1" dirty="0"/>
+              <a:t>(</a:t>
+            </a:r>
+            <a:r>
+              <a:rPr lang="ko-KR" altLang="en-US" sz="1500" b="1" dirty="0"/>
+              <a:t>주인공</a:t>
+            </a:r>
+            <a:r>
+              <a:rPr lang="en-US" altLang="ko-KR" sz="1500" b="1" dirty="0"/>
+              <a:t>)</a:t>
+            </a:r>
+            <a:endParaRPr lang="ko-KR" altLang="en-US" sz="1500" b="1" dirty="0"/>
+          </a:p>
+        </p:txBody>
+      </p:sp>
+      <p:sp>
+        <p:nvSpPr>
+          <p:cNvPr id="6" name="TextBox 5">
+            <a:extLst>
+              <a:ext uri="{FF2B5EF4-FFF2-40B4-BE49-F238E27FC236}">
+                <a16:creationId xmlns:a16="http://schemas.microsoft.com/office/drawing/2014/main" id="{B77B17CA-DC33-64FC-1081-E8D891CA3391}"/>
+              </a:ext>
+            </a:extLst>
+          </p:cNvPr>
+          <p:cNvSpPr txBox="1"/>
+          <p:nvPr/>
+        </p:nvSpPr>
+        <p:spPr>
+          <a:xfrm>
+            <a:off x="762973" y="2042625"/>
+            <a:ext cx="3185705" cy="1075294"/>
+          </a:xfrm>
+          <a:prstGeom prst="rect">
+            <a:avLst/>
+          </a:prstGeom>
+          <a:noFill/>
+        </p:spPr>
+        <p:txBody>
+          <a:bodyPr wrap="square" rtlCol="0">
+            <a:spAutoFit/>
+          </a:bodyPr>
+          <a:lstStyle/>
+          <a:p>
+            <a:pPr marL="171450" indent="-171450">
+              <a:lnSpc>
+                <a:spcPct val="150000"/>
+              </a:lnSpc>
+              <a:buFont typeface="Arial" panose="020B0604020202020204" pitchFamily="34" charset="0"/>
+              <a:buChar char="•"/>
+            </a:pPr>
+            <a:r>
+              <a:rPr lang="ko-KR" altLang="en-US" sz="1100" dirty="0"/>
+              <a:t>역할 </a:t>
+            </a:r>
+            <a:r>
+              <a:rPr lang="en-US" altLang="ko-KR" sz="1100" dirty="0"/>
+              <a:t>: </a:t>
+            </a:r>
+            <a:r>
+              <a:rPr lang="ko-KR" altLang="en-US" sz="1100" dirty="0"/>
+              <a:t>유일한 해결 수단</a:t>
+            </a:r>
+            <a:endParaRPr lang="en-US" altLang="ko-KR" sz="1100" dirty="0"/>
+          </a:p>
+          <a:p>
+            <a:pPr marL="171450" indent="-171450">
+              <a:lnSpc>
+                <a:spcPct val="150000"/>
+              </a:lnSpc>
+              <a:buFont typeface="Arial" panose="020B0604020202020204" pitchFamily="34" charset="0"/>
+              <a:buChar char="•"/>
+            </a:pPr>
+            <a:r>
+              <a:rPr lang="ko-KR" altLang="en-US" sz="1100" dirty="0"/>
+              <a:t>특징 </a:t>
+            </a:r>
+            <a:r>
+              <a:rPr lang="en-US" altLang="ko-KR" sz="1100" dirty="0"/>
+              <a:t>: </a:t>
+            </a:r>
+            <a:r>
+              <a:rPr lang="ko-KR" altLang="en-US" sz="1100" dirty="0"/>
+              <a:t>무한에 가까운 선의</a:t>
+            </a:r>
+            <a:br>
+              <a:rPr lang="en-US" altLang="ko-KR" sz="1100" dirty="0"/>
+            </a:br>
+            <a:r>
+              <a:rPr lang="en-US" altLang="ko-KR" sz="1100" dirty="0"/>
+              <a:t>        </a:t>
+            </a:r>
+            <a:r>
+              <a:rPr lang="ko-KR" altLang="en-US" sz="1100" dirty="0"/>
+              <a:t>선의를 소모해 괴물 제거</a:t>
+            </a:r>
+            <a:br>
+              <a:rPr lang="en-US" altLang="ko-KR" sz="1100" dirty="0"/>
+            </a:br>
+            <a:r>
+              <a:rPr lang="ko-KR" altLang="en-US" sz="1100" dirty="0"/>
+              <a:t>구조 </a:t>
+            </a:r>
+            <a:r>
+              <a:rPr lang="en-US" altLang="ko-KR" sz="1100" dirty="0"/>
+              <a:t>: </a:t>
+            </a:r>
+            <a:r>
+              <a:rPr lang="ko-KR" altLang="en-US" sz="1100" dirty="0"/>
+              <a:t>선택이 아닌 강요된 희생</a:t>
+            </a:r>
+            <a:endParaRPr lang="en-US" altLang="ko-KR" sz="1100" dirty="0"/>
+          </a:p>
+        </p:txBody>
+      </p:sp>
+      <p:sp>
+        <p:nvSpPr>
+          <p:cNvPr id="2" name="TextBox 1">
+            <a:extLst>
+              <a:ext uri="{FF2B5EF4-FFF2-40B4-BE49-F238E27FC236}">
+                <a16:creationId xmlns:a16="http://schemas.microsoft.com/office/drawing/2014/main" id="{4AC7DA49-9A38-AD99-7543-03650BA03320}"/>
+              </a:ext>
+            </a:extLst>
+          </p:cNvPr>
+          <p:cNvSpPr txBox="1"/>
+          <p:nvPr/>
+        </p:nvSpPr>
+        <p:spPr>
+          <a:xfrm>
+            <a:off x="762973" y="645383"/>
+            <a:ext cx="2917372" cy="446276"/>
+          </a:xfrm>
+          <a:prstGeom prst="rect">
+            <a:avLst/>
+          </a:prstGeom>
+          <a:noFill/>
+        </p:spPr>
+        <p:txBody>
+          <a:bodyPr wrap="square" rtlCol="0">
+            <a:spAutoFit/>
+          </a:bodyPr>
+          <a:lstStyle/>
+          <a:p>
+            <a:pPr algn="just"/>
+            <a:r>
+              <a:rPr lang="ko-KR" altLang="en-US" sz="2300" b="1" dirty="0"/>
+              <a:t>등장 인물 컨셉</a:t>
+            </a:r>
+          </a:p>
+        </p:txBody>
+      </p:sp>
+      <p:sp>
+        <p:nvSpPr>
+          <p:cNvPr id="3" name="TextBox 2">
+            <a:extLst>
+              <a:ext uri="{FF2B5EF4-FFF2-40B4-BE49-F238E27FC236}">
+                <a16:creationId xmlns:a16="http://schemas.microsoft.com/office/drawing/2014/main" id="{146BD8E4-844B-5D8C-2910-48B23722AA0E}"/>
+              </a:ext>
+            </a:extLst>
+          </p:cNvPr>
+          <p:cNvSpPr txBox="1"/>
+          <p:nvPr/>
+        </p:nvSpPr>
+        <p:spPr>
+          <a:xfrm>
+            <a:off x="762973" y="4150770"/>
+            <a:ext cx="2917372" cy="323165"/>
+          </a:xfrm>
+          <a:prstGeom prst="rect">
+            <a:avLst/>
+          </a:prstGeom>
+          <a:noFill/>
+        </p:spPr>
+        <p:txBody>
+          <a:bodyPr wrap="square" rtlCol="0">
+            <a:spAutoFit/>
+          </a:bodyPr>
+          <a:lstStyle/>
+          <a:p>
+            <a:r>
+              <a:rPr lang="ko-KR" altLang="en-US" sz="1500" b="1" dirty="0"/>
+              <a:t>시민들</a:t>
+            </a:r>
+          </a:p>
+        </p:txBody>
+      </p:sp>
+      <p:sp>
+        <p:nvSpPr>
+          <p:cNvPr id="7" name="TextBox 6">
+            <a:extLst>
+              <a:ext uri="{FF2B5EF4-FFF2-40B4-BE49-F238E27FC236}">
+                <a16:creationId xmlns:a16="http://schemas.microsoft.com/office/drawing/2014/main" id="{4B219FE4-94BE-ECD6-095E-5A9B538DE8F2}"/>
+              </a:ext>
+            </a:extLst>
+          </p:cNvPr>
+          <p:cNvSpPr txBox="1"/>
+          <p:nvPr/>
+        </p:nvSpPr>
+        <p:spPr>
+          <a:xfrm>
+            <a:off x="762973" y="4589733"/>
+            <a:ext cx="3185705" cy="821379"/>
+          </a:xfrm>
+          <a:prstGeom prst="rect">
+            <a:avLst/>
+          </a:prstGeom>
+          <a:noFill/>
+        </p:spPr>
+        <p:txBody>
+          <a:bodyPr wrap="square" rtlCol="0">
+            <a:spAutoFit/>
+          </a:bodyPr>
+          <a:lstStyle/>
+          <a:p>
+            <a:pPr marL="171450" indent="-171450">
+              <a:lnSpc>
+                <a:spcPct val="150000"/>
+              </a:lnSpc>
+              <a:buFont typeface="Arial" panose="020B0604020202020204" pitchFamily="34" charset="0"/>
+              <a:buChar char="•"/>
+            </a:pPr>
+            <a:r>
+              <a:rPr lang="ko-KR" altLang="en-US" sz="1100" dirty="0"/>
+              <a:t>역할 </a:t>
+            </a:r>
+            <a:r>
+              <a:rPr lang="en-US" altLang="ko-KR" sz="1100" dirty="0"/>
+              <a:t>: </a:t>
+            </a:r>
+            <a:r>
+              <a:rPr lang="ko-KR" altLang="en-US" sz="1100" dirty="0"/>
+              <a:t>요청 → 의존 → 압박</a:t>
+            </a:r>
+            <a:endParaRPr lang="en-US" altLang="ko-KR" sz="1100" dirty="0"/>
+          </a:p>
+          <a:p>
+            <a:pPr marL="171450" indent="-171450">
+              <a:lnSpc>
+                <a:spcPct val="150000"/>
+              </a:lnSpc>
+              <a:buFont typeface="Arial" panose="020B0604020202020204" pitchFamily="34" charset="0"/>
+              <a:buChar char="•"/>
+            </a:pPr>
+            <a:r>
+              <a:rPr lang="ko-KR" altLang="en-US" sz="1100" dirty="0"/>
+              <a:t>특징 </a:t>
+            </a:r>
+            <a:r>
+              <a:rPr lang="en-US" altLang="ko-KR" sz="1100" dirty="0"/>
+              <a:t>: </a:t>
+            </a:r>
+            <a:r>
+              <a:rPr lang="ko-KR" altLang="en-US" sz="1100" dirty="0"/>
+              <a:t>악인보다는 평범한 인간</a:t>
+            </a:r>
+            <a:endParaRPr lang="en-US" altLang="ko-KR" sz="1100" dirty="0"/>
+          </a:p>
+          <a:p>
+            <a:pPr marL="171450" indent="-171450">
+              <a:lnSpc>
+                <a:spcPct val="150000"/>
+              </a:lnSpc>
+              <a:buFont typeface="Arial" panose="020B0604020202020204" pitchFamily="34" charset="0"/>
+              <a:buChar char="•"/>
+            </a:pPr>
+            <a:r>
+              <a:rPr lang="ko-KR" altLang="en-US" sz="1100" dirty="0"/>
+              <a:t>구조 </a:t>
+            </a:r>
+            <a:r>
+              <a:rPr lang="en-US" altLang="ko-KR" sz="1100" dirty="0"/>
+              <a:t>: </a:t>
+            </a:r>
+            <a:r>
+              <a:rPr lang="ko-KR" altLang="en-US" sz="1100" dirty="0"/>
+              <a:t>책임 전가</a:t>
+            </a:r>
+            <a:endParaRPr lang="en-US" altLang="ko-KR" sz="1100" dirty="0"/>
+          </a:p>
+        </p:txBody>
+      </p:sp>
+      <p:sp>
+        <p:nvSpPr>
+          <p:cNvPr id="8" name="TextBox 7">
+            <a:extLst>
+              <a:ext uri="{FF2B5EF4-FFF2-40B4-BE49-F238E27FC236}">
+                <a16:creationId xmlns:a16="http://schemas.microsoft.com/office/drawing/2014/main" id="{694E7E32-BBA8-D6F1-F9C5-C98C871F8827}"/>
+              </a:ext>
+            </a:extLst>
+          </p:cNvPr>
+          <p:cNvSpPr txBox="1"/>
+          <p:nvPr/>
+        </p:nvSpPr>
+        <p:spPr>
+          <a:xfrm>
+            <a:off x="4720949" y="1603662"/>
+            <a:ext cx="2917372" cy="323165"/>
+          </a:xfrm>
+          <a:prstGeom prst="rect">
+            <a:avLst/>
+          </a:prstGeom>
+          <a:noFill/>
+        </p:spPr>
+        <p:txBody>
+          <a:bodyPr wrap="square" rtlCol="0">
+            <a:spAutoFit/>
+          </a:bodyPr>
+          <a:lstStyle/>
+          <a:p>
+            <a:r>
+              <a:rPr lang="ko-KR" altLang="en-US" sz="1500" b="1" dirty="0" err="1"/>
+              <a:t>서주안</a:t>
+            </a:r>
+            <a:r>
+              <a:rPr lang="ko-KR" altLang="en-US" sz="1500" b="1" dirty="0"/>
+              <a:t> </a:t>
+            </a:r>
+            <a:r>
+              <a:rPr lang="en-US" altLang="ko-KR" sz="1500" b="1" dirty="0"/>
+              <a:t>(</a:t>
+            </a:r>
+            <a:r>
+              <a:rPr lang="ko-KR" altLang="en-US" sz="1500" b="1" dirty="0"/>
+              <a:t>친구</a:t>
+            </a:r>
+            <a:r>
+              <a:rPr lang="en-US" altLang="ko-KR" sz="1500" b="1" dirty="0"/>
+              <a:t>)</a:t>
+            </a:r>
+            <a:endParaRPr lang="ko-KR" altLang="en-US" sz="1500" b="1" dirty="0"/>
+          </a:p>
+        </p:txBody>
+      </p:sp>
+      <p:sp>
+        <p:nvSpPr>
+          <p:cNvPr id="9" name="TextBox 8">
+            <a:extLst>
+              <a:ext uri="{FF2B5EF4-FFF2-40B4-BE49-F238E27FC236}">
+                <a16:creationId xmlns:a16="http://schemas.microsoft.com/office/drawing/2014/main" id="{65FB9DF3-10D5-FAE8-0CC5-C1B48F900F64}"/>
+              </a:ext>
+            </a:extLst>
+          </p:cNvPr>
+          <p:cNvSpPr txBox="1"/>
+          <p:nvPr/>
+        </p:nvSpPr>
+        <p:spPr>
+          <a:xfrm>
+            <a:off x="4720949" y="2042625"/>
+            <a:ext cx="3185705" cy="821379"/>
+          </a:xfrm>
+          <a:prstGeom prst="rect">
+            <a:avLst/>
+          </a:prstGeom>
+          <a:noFill/>
+        </p:spPr>
+        <p:txBody>
+          <a:bodyPr wrap="square" rtlCol="0">
+            <a:spAutoFit/>
+          </a:bodyPr>
+          <a:lstStyle/>
+          <a:p>
+            <a:pPr marL="171450" indent="-171450">
+              <a:lnSpc>
+                <a:spcPct val="150000"/>
+              </a:lnSpc>
+              <a:buFont typeface="Arial" panose="020B0604020202020204" pitchFamily="34" charset="0"/>
+              <a:buChar char="•"/>
+            </a:pPr>
+            <a:r>
+              <a:rPr lang="ko-KR" altLang="en-US" sz="1100" dirty="0"/>
+              <a:t>역할 </a:t>
+            </a:r>
+            <a:r>
+              <a:rPr lang="en-US" altLang="ko-KR" sz="1100" dirty="0"/>
+              <a:t>: </a:t>
+            </a:r>
+            <a:r>
+              <a:rPr lang="ko-KR" altLang="en-US" sz="1100" dirty="0"/>
+              <a:t>유일한 </a:t>
+            </a:r>
+            <a:r>
+              <a:rPr lang="ko-KR" altLang="en-US" sz="1100" dirty="0" err="1"/>
+              <a:t>공감자</a:t>
+            </a:r>
+            <a:endParaRPr lang="en-US" altLang="ko-KR" sz="1100" dirty="0"/>
+          </a:p>
+          <a:p>
+            <a:pPr marL="171450" indent="-171450">
+              <a:lnSpc>
+                <a:spcPct val="150000"/>
+              </a:lnSpc>
+              <a:buFont typeface="Arial" panose="020B0604020202020204" pitchFamily="34" charset="0"/>
+              <a:buChar char="•"/>
+            </a:pPr>
+            <a:r>
+              <a:rPr lang="ko-KR" altLang="en-US" sz="1100" dirty="0"/>
+              <a:t>특징 </a:t>
+            </a:r>
+            <a:r>
+              <a:rPr lang="en-US" altLang="ko-KR" sz="1100" dirty="0"/>
+              <a:t>: </a:t>
+            </a:r>
+            <a:r>
+              <a:rPr lang="ko-KR" altLang="en-US" sz="1100" dirty="0"/>
+              <a:t>구조의 문제를 인식</a:t>
+            </a:r>
+            <a:br>
+              <a:rPr lang="en-US" altLang="ko-KR" sz="1100" dirty="0"/>
+            </a:br>
+            <a:r>
+              <a:rPr lang="en-US" altLang="ko-KR" sz="1100" dirty="0"/>
+              <a:t>         ‘</a:t>
+            </a:r>
+            <a:r>
+              <a:rPr lang="ko-KR" altLang="en-US" sz="1100" dirty="0"/>
+              <a:t>그만둘 수 있음</a:t>
+            </a:r>
+            <a:r>
+              <a:rPr lang="en-US" altLang="ko-KR" sz="1100" dirty="0"/>
+              <a:t>’</a:t>
+            </a:r>
+            <a:r>
+              <a:rPr lang="ko-KR" altLang="en-US" sz="1100" dirty="0"/>
+              <a:t>을 제시</a:t>
+            </a:r>
+            <a:endParaRPr lang="en-US" altLang="ko-KR" sz="1100" dirty="0"/>
+          </a:p>
+        </p:txBody>
+      </p:sp>
+      <p:sp>
+        <p:nvSpPr>
+          <p:cNvPr id="10" name="TextBox 9">
+            <a:extLst>
+              <a:ext uri="{FF2B5EF4-FFF2-40B4-BE49-F238E27FC236}">
+                <a16:creationId xmlns:a16="http://schemas.microsoft.com/office/drawing/2014/main" id="{F8630DB8-C7FC-3434-F094-B1DB54A37D7F}"/>
+              </a:ext>
+            </a:extLst>
+          </p:cNvPr>
+          <p:cNvSpPr txBox="1"/>
+          <p:nvPr/>
+        </p:nvSpPr>
+        <p:spPr>
+          <a:xfrm>
+            <a:off x="4720949" y="4150770"/>
+            <a:ext cx="2917372" cy="323165"/>
+          </a:xfrm>
+          <a:prstGeom prst="rect">
+            <a:avLst/>
+          </a:prstGeom>
+          <a:noFill/>
+        </p:spPr>
+        <p:txBody>
+          <a:bodyPr wrap="square" rtlCol="0">
+            <a:spAutoFit/>
+          </a:bodyPr>
+          <a:lstStyle/>
+          <a:p>
+            <a:r>
+              <a:rPr lang="ko-KR" altLang="en-US" sz="1500" b="1" dirty="0"/>
+              <a:t>정치 권력 </a:t>
+            </a:r>
+            <a:r>
+              <a:rPr lang="en-US" altLang="ko-KR" sz="1500" b="1" dirty="0"/>
+              <a:t>(</a:t>
+            </a:r>
+            <a:r>
+              <a:rPr lang="ko-KR" altLang="en-US" sz="1500" b="1" dirty="0"/>
+              <a:t>정부</a:t>
+            </a:r>
+            <a:r>
+              <a:rPr lang="en-US" altLang="ko-KR" sz="1500" b="1" dirty="0"/>
+              <a:t>)</a:t>
+            </a:r>
+            <a:endParaRPr lang="ko-KR" altLang="en-US" sz="1500" b="1" dirty="0"/>
+          </a:p>
+        </p:txBody>
+      </p:sp>
+      <p:sp>
+        <p:nvSpPr>
+          <p:cNvPr id="11" name="TextBox 10">
+            <a:extLst>
+              <a:ext uri="{FF2B5EF4-FFF2-40B4-BE49-F238E27FC236}">
+                <a16:creationId xmlns:a16="http://schemas.microsoft.com/office/drawing/2014/main" id="{239F6B74-06E5-81DE-4DAA-305FE7FD33A5}"/>
+              </a:ext>
+            </a:extLst>
+          </p:cNvPr>
+          <p:cNvSpPr txBox="1"/>
+          <p:nvPr/>
+        </p:nvSpPr>
+        <p:spPr>
+          <a:xfrm>
+            <a:off x="4720949" y="4589733"/>
+            <a:ext cx="3185705" cy="567463"/>
+          </a:xfrm>
+          <a:prstGeom prst="rect">
+            <a:avLst/>
+          </a:prstGeom>
+          <a:noFill/>
+        </p:spPr>
+        <p:txBody>
+          <a:bodyPr wrap="square" rtlCol="0">
+            <a:spAutoFit/>
+          </a:bodyPr>
+          <a:lstStyle/>
+          <a:p>
+            <a:pPr marL="171450" indent="-171450">
+              <a:lnSpc>
+                <a:spcPct val="150000"/>
+              </a:lnSpc>
+              <a:buFont typeface="Arial" panose="020B0604020202020204" pitchFamily="34" charset="0"/>
+              <a:buChar char="•"/>
+            </a:pPr>
+            <a:r>
+              <a:rPr lang="ko-KR" altLang="en-US" sz="1100" dirty="0"/>
+              <a:t>역할 </a:t>
+            </a:r>
+            <a:r>
+              <a:rPr lang="en-US" altLang="ko-KR" sz="1100" dirty="0"/>
+              <a:t>: </a:t>
+            </a:r>
+            <a:r>
+              <a:rPr lang="ko-KR" altLang="en-US" sz="1100" dirty="0"/>
+              <a:t>구조를 정당화하는 존재</a:t>
+            </a:r>
+            <a:endParaRPr lang="en-US" altLang="ko-KR" sz="1100" dirty="0"/>
+          </a:p>
+          <a:p>
+            <a:pPr marL="171450" indent="-171450">
+              <a:lnSpc>
+                <a:spcPct val="150000"/>
+              </a:lnSpc>
+              <a:buFont typeface="Arial" panose="020B0604020202020204" pitchFamily="34" charset="0"/>
+              <a:buChar char="•"/>
+            </a:pPr>
+            <a:r>
+              <a:rPr lang="ko-KR" altLang="en-US" sz="1100" dirty="0"/>
+              <a:t>특징 </a:t>
+            </a:r>
+            <a:r>
+              <a:rPr lang="en-US" altLang="ko-KR" sz="1100" dirty="0"/>
+              <a:t>: </a:t>
+            </a:r>
+            <a:r>
+              <a:rPr lang="ko-KR" altLang="en-US" sz="1100" dirty="0"/>
+              <a:t>희생을 </a:t>
+            </a:r>
+            <a:r>
+              <a:rPr lang="en-US" altLang="ko-KR" sz="1100" dirty="0"/>
+              <a:t>‘</a:t>
+            </a:r>
+            <a:r>
+              <a:rPr lang="ko-KR" altLang="en-US" sz="1100" dirty="0"/>
+              <a:t>공익</a:t>
+            </a:r>
+            <a:r>
+              <a:rPr lang="en-US" altLang="ko-KR" sz="1100" dirty="0"/>
+              <a:t>’</a:t>
+            </a:r>
+            <a:r>
+              <a:rPr lang="ko-KR" altLang="en-US" sz="1100" dirty="0"/>
+              <a:t>으로 강요</a:t>
+            </a:r>
+            <a:endParaRPr lang="en-US" altLang="ko-KR" sz="1100" dirty="0"/>
+          </a:p>
+        </p:txBody>
+      </p:sp>
+      <p:sp>
+        <p:nvSpPr>
+          <p:cNvPr id="12" name="TextBox 11">
+            <a:extLst>
+              <a:ext uri="{FF2B5EF4-FFF2-40B4-BE49-F238E27FC236}">
+                <a16:creationId xmlns:a16="http://schemas.microsoft.com/office/drawing/2014/main" id="{B13C7926-D660-0EA9-2C6D-BE35A15D03B5}"/>
+              </a:ext>
+            </a:extLst>
+          </p:cNvPr>
+          <p:cNvSpPr txBox="1"/>
+          <p:nvPr/>
+        </p:nvSpPr>
+        <p:spPr>
+          <a:xfrm>
+            <a:off x="8410592" y="1603662"/>
+            <a:ext cx="2917372" cy="323165"/>
+          </a:xfrm>
+          <a:prstGeom prst="rect">
+            <a:avLst/>
+          </a:prstGeom>
+          <a:noFill/>
+        </p:spPr>
+        <p:txBody>
+          <a:bodyPr wrap="square" rtlCol="0">
+            <a:spAutoFit/>
+          </a:bodyPr>
+          <a:lstStyle/>
+          <a:p>
+            <a:r>
+              <a:rPr lang="ko-KR" altLang="en-US" sz="1500" b="1" dirty="0" err="1"/>
+              <a:t>차우선</a:t>
+            </a:r>
+            <a:r>
+              <a:rPr lang="ko-KR" altLang="en-US" sz="1500" b="1" dirty="0"/>
+              <a:t> </a:t>
+            </a:r>
+            <a:r>
+              <a:rPr lang="en-US" altLang="ko-KR" sz="1500" b="1" dirty="0"/>
+              <a:t>(</a:t>
+            </a:r>
+            <a:r>
+              <a:rPr lang="ko-KR" altLang="en-US" sz="1500" b="1" dirty="0"/>
+              <a:t>동생</a:t>
+            </a:r>
+            <a:r>
+              <a:rPr lang="en-US" altLang="ko-KR" sz="1500" b="1" dirty="0"/>
+              <a:t>)</a:t>
+            </a:r>
+            <a:endParaRPr lang="ko-KR" altLang="en-US" sz="1500" b="1" dirty="0"/>
+          </a:p>
+        </p:txBody>
+      </p:sp>
+      <p:sp>
+        <p:nvSpPr>
+          <p:cNvPr id="13" name="TextBox 12">
+            <a:extLst>
+              <a:ext uri="{FF2B5EF4-FFF2-40B4-BE49-F238E27FC236}">
+                <a16:creationId xmlns:a16="http://schemas.microsoft.com/office/drawing/2014/main" id="{30125C0F-36AB-3BF9-3857-10FC2747BBE3}"/>
+              </a:ext>
+            </a:extLst>
+          </p:cNvPr>
+          <p:cNvSpPr txBox="1"/>
+          <p:nvPr/>
+        </p:nvSpPr>
+        <p:spPr>
+          <a:xfrm>
+            <a:off x="8410592" y="2042625"/>
+            <a:ext cx="3185705" cy="567463"/>
+          </a:xfrm>
+          <a:prstGeom prst="rect">
+            <a:avLst/>
+          </a:prstGeom>
+          <a:noFill/>
+        </p:spPr>
+        <p:txBody>
+          <a:bodyPr wrap="square" rtlCol="0">
+            <a:spAutoFit/>
+          </a:bodyPr>
+          <a:lstStyle/>
+          <a:p>
+            <a:pPr marL="171450" indent="-171450">
+              <a:lnSpc>
+                <a:spcPct val="150000"/>
+              </a:lnSpc>
+              <a:buFont typeface="Arial" panose="020B0604020202020204" pitchFamily="34" charset="0"/>
+              <a:buChar char="•"/>
+            </a:pPr>
+            <a:r>
+              <a:rPr lang="ko-KR" altLang="en-US" sz="1100" dirty="0"/>
+              <a:t>역할 </a:t>
+            </a:r>
+            <a:r>
+              <a:rPr lang="en-US" altLang="ko-KR" sz="1100" dirty="0"/>
+              <a:t>: </a:t>
+            </a:r>
+            <a:r>
+              <a:rPr lang="ko-KR" altLang="en-US" sz="1100" dirty="0"/>
+              <a:t>사적 영역의 착취자</a:t>
+            </a:r>
+            <a:endParaRPr lang="en-US" altLang="ko-KR" sz="1100" dirty="0"/>
+          </a:p>
+          <a:p>
+            <a:pPr marL="171450" indent="-171450">
+              <a:lnSpc>
+                <a:spcPct val="150000"/>
+              </a:lnSpc>
+              <a:buFont typeface="Arial" panose="020B0604020202020204" pitchFamily="34" charset="0"/>
+              <a:buChar char="•"/>
+            </a:pPr>
+            <a:r>
+              <a:rPr lang="ko-KR" altLang="en-US" sz="1100" dirty="0"/>
+              <a:t>특징 </a:t>
+            </a:r>
+            <a:r>
+              <a:rPr lang="en-US" altLang="ko-KR" sz="1100" dirty="0"/>
+              <a:t>: </a:t>
+            </a:r>
+            <a:r>
+              <a:rPr lang="ko-KR" altLang="en-US" sz="1100" dirty="0"/>
+              <a:t>주인공을 가족 자산으로 인식</a:t>
+            </a:r>
+            <a:endParaRPr lang="en-US" altLang="ko-KR" sz="1100" dirty="0"/>
+          </a:p>
+        </p:txBody>
+      </p:sp>
+      <p:sp>
+        <p:nvSpPr>
+          <p:cNvPr id="16" name="TextBox 15">
+            <a:extLst>
+              <a:ext uri="{FF2B5EF4-FFF2-40B4-BE49-F238E27FC236}">
+                <a16:creationId xmlns:a16="http://schemas.microsoft.com/office/drawing/2014/main" id="{7DC96106-06FF-2B9A-2C80-E10A40D6A042}"/>
+              </a:ext>
+            </a:extLst>
+          </p:cNvPr>
+          <p:cNvSpPr txBox="1"/>
+          <p:nvPr/>
+        </p:nvSpPr>
+        <p:spPr>
+          <a:xfrm>
+            <a:off x="8410592" y="4150770"/>
+            <a:ext cx="2917372" cy="323165"/>
+          </a:xfrm>
+          <a:prstGeom prst="rect">
+            <a:avLst/>
+          </a:prstGeom>
+          <a:noFill/>
+        </p:spPr>
+        <p:txBody>
+          <a:bodyPr wrap="square" rtlCol="0">
+            <a:spAutoFit/>
+          </a:bodyPr>
+          <a:lstStyle/>
+          <a:p>
+            <a:r>
+              <a:rPr lang="ko-KR" altLang="en-US" sz="1500" b="1" dirty="0"/>
+              <a:t>괴물</a:t>
+            </a:r>
+          </a:p>
+        </p:txBody>
+      </p:sp>
+      <p:sp>
+        <p:nvSpPr>
+          <p:cNvPr id="17" name="TextBox 16">
+            <a:extLst>
+              <a:ext uri="{FF2B5EF4-FFF2-40B4-BE49-F238E27FC236}">
+                <a16:creationId xmlns:a16="http://schemas.microsoft.com/office/drawing/2014/main" id="{89346F67-218E-BFAB-586B-4363355922BC}"/>
+              </a:ext>
+            </a:extLst>
+          </p:cNvPr>
+          <p:cNvSpPr txBox="1"/>
+          <p:nvPr/>
+        </p:nvSpPr>
+        <p:spPr>
+          <a:xfrm>
+            <a:off x="8410592" y="4589733"/>
+            <a:ext cx="3185705" cy="821379"/>
+          </a:xfrm>
+          <a:prstGeom prst="rect">
+            <a:avLst/>
+          </a:prstGeom>
+          <a:noFill/>
+        </p:spPr>
+        <p:txBody>
+          <a:bodyPr wrap="square" rtlCol="0">
+            <a:spAutoFit/>
+          </a:bodyPr>
+          <a:lstStyle/>
+          <a:p>
+            <a:pPr marL="171450" indent="-171450">
+              <a:lnSpc>
+                <a:spcPct val="150000"/>
+              </a:lnSpc>
+              <a:buFont typeface="Arial" panose="020B0604020202020204" pitchFamily="34" charset="0"/>
+              <a:buChar char="•"/>
+            </a:pPr>
+            <a:r>
+              <a:rPr lang="ko-KR" altLang="en-US" sz="1100" dirty="0"/>
+              <a:t>역할 </a:t>
+            </a:r>
+            <a:r>
+              <a:rPr lang="en-US" altLang="ko-KR" sz="1100" dirty="0"/>
+              <a:t>: </a:t>
+            </a:r>
+            <a:r>
+              <a:rPr lang="ko-KR" altLang="en-US" sz="1100" dirty="0"/>
+              <a:t>전투 대상</a:t>
+            </a:r>
+            <a:endParaRPr lang="en-US" altLang="ko-KR" sz="1100" dirty="0"/>
+          </a:p>
+          <a:p>
+            <a:pPr marL="171450" indent="-171450">
+              <a:lnSpc>
+                <a:spcPct val="150000"/>
+              </a:lnSpc>
+              <a:buFont typeface="Arial" panose="020B0604020202020204" pitchFamily="34" charset="0"/>
+              <a:buChar char="•"/>
+            </a:pPr>
+            <a:r>
+              <a:rPr lang="ko-KR" altLang="en-US" sz="1100" dirty="0"/>
+              <a:t>특징 </a:t>
+            </a:r>
+            <a:r>
+              <a:rPr lang="en-US" altLang="ko-KR" sz="1100" dirty="0"/>
+              <a:t>: </a:t>
+            </a:r>
+            <a:r>
+              <a:rPr lang="ko-KR" altLang="en-US" sz="1100" dirty="0"/>
+              <a:t>선의가 붕괴된 인간이 균열에서 변이</a:t>
+            </a:r>
+            <a:endParaRPr lang="en-US" altLang="ko-KR" sz="1100" dirty="0"/>
+          </a:p>
+          <a:p>
+            <a:pPr marL="171450" indent="-171450">
+              <a:lnSpc>
+                <a:spcPct val="150000"/>
+              </a:lnSpc>
+              <a:buFont typeface="Arial" panose="020B0604020202020204" pitchFamily="34" charset="0"/>
+              <a:buChar char="•"/>
+            </a:pPr>
+            <a:r>
+              <a:rPr lang="ko-KR" altLang="en-US" sz="1100" dirty="0"/>
+              <a:t>상징 </a:t>
+            </a:r>
+            <a:r>
+              <a:rPr lang="en-US" altLang="ko-KR" sz="1100" dirty="0"/>
+              <a:t>: </a:t>
+            </a:r>
+            <a:r>
+              <a:rPr lang="ko-KR" altLang="en-US" sz="1100" dirty="0"/>
+              <a:t>붕괴된 인간의 결과</a:t>
+            </a:r>
+            <a:endParaRPr lang="en-US" altLang="ko-KR" sz="1100" dirty="0"/>
+          </a:p>
+        </p:txBody>
+      </p:sp>
+    </p:spTree>
+    <p:extLst>
+      <p:ext uri="{BB962C8B-B14F-4D97-AF65-F5344CB8AC3E}">
+        <p14:creationId xmlns:p14="http://schemas.microsoft.com/office/powerpoint/2010/main" val="3335290019"/>
+      </p:ext>
+    </p:extLst>
+  </p:cSld>
+  <p:clrMapOvr>
+    <a:masterClrMapping/>
+  </p:clrMapOvr>
+</p:sld>
+</file>
+
+<file path=ppt/slides/slide6.xml><?xml version="1.0" encoding="utf-8"?>
+<p:sld xmlns:a="http://schemas.openxmlformats.org/drawingml/2006/main" xmlns:r="http://schemas.openxmlformats.org/officeDocument/2006/relationships" xmlns:p="http://schemas.openxmlformats.org/presentationml/2006/main">
+  <p:cSld>
+    <p:spTree>
+      <p:nvGrpSpPr>
+        <p:cNvPr id="1" name="">
+          <a:extLst>
+            <a:ext uri="{FF2B5EF4-FFF2-40B4-BE49-F238E27FC236}">
+              <a16:creationId xmlns:a16="http://schemas.microsoft.com/office/drawing/2014/main" id="{305D60C3-1AE4-0D14-14AD-BA735BA52693}"/>
+            </a:ext>
+          </a:extLst>
+        </p:cNvPr>
+        <p:cNvGrpSpPr/>
+        <p:nvPr/>
+      </p:nvGrpSpPr>
+      <p:grpSpPr>
+        <a:xfrm>
+          <a:off x="0" y="0"/>
+          <a:ext cx="0" cy="0"/>
+          <a:chOff x="0" y="0"/>
+          <a:chExt cx="0" cy="0"/>
+        </a:xfrm>
+      </p:grpSpPr>
+      <p:sp>
+        <p:nvSpPr>
+          <p:cNvPr id="4" name="TextBox 3">
+            <a:extLst>
+              <a:ext uri="{FF2B5EF4-FFF2-40B4-BE49-F238E27FC236}">
+                <a16:creationId xmlns:a16="http://schemas.microsoft.com/office/drawing/2014/main" id="{CEB45F61-20FE-6203-B46B-17C565B55CA2}"/>
+              </a:ext>
+            </a:extLst>
+          </p:cNvPr>
+          <p:cNvSpPr txBox="1"/>
+          <p:nvPr/>
+        </p:nvSpPr>
+        <p:spPr>
+          <a:xfrm>
+            <a:off x="762973" y="1603662"/>
+            <a:ext cx="2917372" cy="323165"/>
+          </a:xfrm>
+          <a:prstGeom prst="rect">
+            <a:avLst/>
+          </a:prstGeom>
+          <a:noFill/>
+        </p:spPr>
+        <p:txBody>
+          <a:bodyPr wrap="square" rtlCol="0">
+            <a:spAutoFit/>
+          </a:bodyPr>
+          <a:lstStyle/>
+          <a:p>
+            <a:r>
+              <a:rPr lang="ko-KR" altLang="en-US" sz="1500" b="1" dirty="0"/>
+              <a:t>세계 구조</a:t>
+            </a:r>
+          </a:p>
+        </p:txBody>
+      </p:sp>
+      <p:sp>
+        <p:nvSpPr>
+          <p:cNvPr id="6" name="TextBox 5">
+            <a:extLst>
+              <a:ext uri="{FF2B5EF4-FFF2-40B4-BE49-F238E27FC236}">
+                <a16:creationId xmlns:a16="http://schemas.microsoft.com/office/drawing/2014/main" id="{9EEC6482-D877-21DA-938F-520C12AC4E3E}"/>
+              </a:ext>
+            </a:extLst>
+          </p:cNvPr>
+          <p:cNvSpPr txBox="1"/>
+          <p:nvPr/>
+        </p:nvSpPr>
+        <p:spPr>
+          <a:xfrm>
+            <a:off x="762973" y="2042625"/>
+            <a:ext cx="3185705" cy="313547"/>
+          </a:xfrm>
+          <a:prstGeom prst="rect">
+            <a:avLst/>
+          </a:prstGeom>
+          <a:noFill/>
+        </p:spPr>
+        <p:txBody>
+          <a:bodyPr wrap="square" rtlCol="0">
+            <a:spAutoFit/>
+          </a:bodyPr>
+          <a:lstStyle/>
+          <a:p>
+            <a:pPr marL="171450" indent="-171450">
+              <a:lnSpc>
+                <a:spcPct val="150000"/>
+              </a:lnSpc>
+              <a:buFont typeface="Arial" panose="020B0604020202020204" pitchFamily="34" charset="0"/>
+              <a:buChar char="•"/>
+            </a:pPr>
+            <a:r>
+              <a:rPr lang="ko-KR" altLang="en-US" sz="1100" dirty="0"/>
+              <a:t>다수의 책임 → 단일 책임 집중</a:t>
+            </a:r>
+            <a:endParaRPr lang="en-US" altLang="ko-KR" sz="1100" dirty="0"/>
+          </a:p>
+        </p:txBody>
+      </p:sp>
+      <p:sp>
+        <p:nvSpPr>
+          <p:cNvPr id="2" name="TextBox 1">
+            <a:extLst>
+              <a:ext uri="{FF2B5EF4-FFF2-40B4-BE49-F238E27FC236}">
+                <a16:creationId xmlns:a16="http://schemas.microsoft.com/office/drawing/2014/main" id="{2C8F8A44-4E19-0835-A954-84D17E9C8055}"/>
+              </a:ext>
+            </a:extLst>
+          </p:cNvPr>
+          <p:cNvSpPr txBox="1"/>
+          <p:nvPr/>
+        </p:nvSpPr>
+        <p:spPr>
+          <a:xfrm>
+            <a:off x="762973" y="645383"/>
+            <a:ext cx="2917372" cy="446276"/>
+          </a:xfrm>
+          <a:prstGeom prst="rect">
+            <a:avLst/>
+          </a:prstGeom>
+          <a:noFill/>
+        </p:spPr>
+        <p:txBody>
+          <a:bodyPr wrap="square" rtlCol="0">
+            <a:spAutoFit/>
+          </a:bodyPr>
+          <a:lstStyle/>
+          <a:p>
+            <a:pPr algn="just"/>
+            <a:r>
+              <a:rPr lang="ko-KR" altLang="en-US" sz="2300" b="1" dirty="0"/>
+              <a:t>등장 무대 컨셉</a:t>
+            </a:r>
+          </a:p>
+        </p:txBody>
+      </p:sp>
+      <p:sp>
+        <p:nvSpPr>
+          <p:cNvPr id="8" name="TextBox 7">
+            <a:extLst>
+              <a:ext uri="{FF2B5EF4-FFF2-40B4-BE49-F238E27FC236}">
+                <a16:creationId xmlns:a16="http://schemas.microsoft.com/office/drawing/2014/main" id="{EBE3E813-44F8-4300-33B4-07C02406AD86}"/>
+              </a:ext>
+            </a:extLst>
+          </p:cNvPr>
+          <p:cNvSpPr txBox="1"/>
+          <p:nvPr/>
+        </p:nvSpPr>
+        <p:spPr>
+          <a:xfrm>
+            <a:off x="4720949" y="1603662"/>
+            <a:ext cx="2917372" cy="323165"/>
+          </a:xfrm>
+          <a:prstGeom prst="rect">
+            <a:avLst/>
+          </a:prstGeom>
+          <a:noFill/>
+        </p:spPr>
+        <p:txBody>
+          <a:bodyPr wrap="square" rtlCol="0">
+            <a:spAutoFit/>
+          </a:bodyPr>
+          <a:lstStyle/>
+          <a:p>
+            <a:r>
+              <a:rPr lang="ko-KR" altLang="en-US" sz="1500" b="1" dirty="0"/>
+              <a:t>주요 공간</a:t>
+            </a:r>
+          </a:p>
+        </p:txBody>
+      </p:sp>
+      <p:sp>
+        <p:nvSpPr>
+          <p:cNvPr id="9" name="TextBox 8">
+            <a:extLst>
+              <a:ext uri="{FF2B5EF4-FFF2-40B4-BE49-F238E27FC236}">
+                <a16:creationId xmlns:a16="http://schemas.microsoft.com/office/drawing/2014/main" id="{A4CB4E8B-9655-CD1A-32C8-AF8DD858C072}"/>
+              </a:ext>
+            </a:extLst>
+          </p:cNvPr>
+          <p:cNvSpPr txBox="1"/>
+          <p:nvPr/>
+        </p:nvSpPr>
+        <p:spPr>
+          <a:xfrm>
+            <a:off x="4720949" y="2042625"/>
+            <a:ext cx="3185705" cy="1075294"/>
+          </a:xfrm>
+          <a:prstGeom prst="rect">
+            <a:avLst/>
+          </a:prstGeom>
+          <a:noFill/>
+        </p:spPr>
+        <p:txBody>
+          <a:bodyPr wrap="square" rtlCol="0">
+            <a:spAutoFit/>
+          </a:bodyPr>
+          <a:lstStyle/>
+          <a:p>
+            <a:pPr>
+              <a:lnSpc>
+                <a:spcPct val="150000"/>
+              </a:lnSpc>
+            </a:pPr>
+            <a:r>
+              <a:rPr lang="en-US" altLang="ko-KR" sz="1100" b="1" dirty="0"/>
+              <a:t>[ </a:t>
+            </a:r>
+            <a:r>
+              <a:rPr lang="ko-KR" altLang="en-US" sz="1100" b="1" dirty="0"/>
+              <a:t>도시 중심부 </a:t>
+            </a:r>
+            <a:r>
+              <a:rPr lang="en-US" altLang="ko-KR" sz="1100" b="1" dirty="0"/>
+              <a:t>(</a:t>
+            </a:r>
+            <a:r>
+              <a:rPr lang="ko-KR" altLang="en-US" sz="1100" b="1" dirty="0"/>
+              <a:t>거점</a:t>
+            </a:r>
+            <a:r>
+              <a:rPr lang="en-US" altLang="ko-KR" sz="1100" b="1" dirty="0"/>
+              <a:t>) ]</a:t>
+            </a:r>
+          </a:p>
+          <a:p>
+            <a:pPr marL="171450" indent="-171450">
+              <a:lnSpc>
+                <a:spcPct val="150000"/>
+              </a:lnSpc>
+              <a:buFont typeface="Arial" panose="020B0604020202020204" pitchFamily="34" charset="0"/>
+              <a:buChar char="•"/>
+            </a:pPr>
+            <a:r>
+              <a:rPr lang="ko-KR" altLang="en-US" sz="1100" dirty="0"/>
+              <a:t>기능 </a:t>
+            </a:r>
+            <a:r>
+              <a:rPr lang="en-US" altLang="ko-KR" sz="1100" dirty="0"/>
+              <a:t>: </a:t>
+            </a:r>
+            <a:r>
+              <a:rPr lang="ko-KR" altLang="en-US" sz="1100" dirty="0"/>
+              <a:t>강화</a:t>
+            </a:r>
+            <a:r>
+              <a:rPr lang="en-US" altLang="ko-KR" sz="1100" dirty="0"/>
+              <a:t> / </a:t>
+            </a:r>
+            <a:r>
+              <a:rPr lang="ko-KR" altLang="en-US" sz="1100" dirty="0"/>
+              <a:t>장비</a:t>
+            </a:r>
+            <a:r>
+              <a:rPr lang="en-US" altLang="ko-KR" sz="1100" dirty="0"/>
+              <a:t> / </a:t>
+            </a:r>
+            <a:r>
+              <a:rPr lang="ko-KR" altLang="en-US" sz="1100" dirty="0"/>
+              <a:t>준비</a:t>
+            </a:r>
+            <a:endParaRPr lang="en-US" altLang="ko-KR" sz="1100" dirty="0"/>
+          </a:p>
+          <a:p>
+            <a:pPr marL="171450" indent="-171450">
+              <a:lnSpc>
+                <a:spcPct val="150000"/>
+              </a:lnSpc>
+              <a:buFont typeface="Arial" panose="020B0604020202020204" pitchFamily="34" charset="0"/>
+              <a:buChar char="•"/>
+            </a:pPr>
+            <a:r>
+              <a:rPr lang="ko-KR" altLang="en-US" sz="1100" dirty="0"/>
+              <a:t>특징 </a:t>
+            </a:r>
+            <a:r>
+              <a:rPr lang="en-US" altLang="ko-KR" sz="1100" dirty="0"/>
+              <a:t>: </a:t>
+            </a:r>
+            <a:r>
+              <a:rPr lang="ko-KR" altLang="en-US" sz="1100" dirty="0"/>
+              <a:t>밝고 안정된 외형</a:t>
+            </a:r>
+            <a:endParaRPr lang="en-US" altLang="ko-KR" sz="1100" dirty="0"/>
+          </a:p>
+          <a:p>
+            <a:pPr marL="171450" indent="-171450">
+              <a:lnSpc>
+                <a:spcPct val="150000"/>
+              </a:lnSpc>
+              <a:buFont typeface="Arial" panose="020B0604020202020204" pitchFamily="34" charset="0"/>
+              <a:buChar char="•"/>
+            </a:pPr>
+            <a:r>
+              <a:rPr lang="ko-KR" altLang="en-US" sz="1100" dirty="0"/>
+              <a:t>의미 </a:t>
+            </a:r>
+            <a:r>
+              <a:rPr lang="en-US" altLang="ko-KR" sz="1100" dirty="0"/>
+              <a:t>: </a:t>
+            </a:r>
+            <a:r>
+              <a:rPr lang="ko-KR" altLang="en-US" sz="1100" dirty="0"/>
+              <a:t>효율적인 소모를 위한 공간</a:t>
+            </a:r>
+            <a:endParaRPr lang="en-US" altLang="ko-KR" sz="1100" dirty="0"/>
+          </a:p>
+        </p:txBody>
+      </p:sp>
+      <p:sp>
+        <p:nvSpPr>
+          <p:cNvPr id="11" name="TextBox 10">
+            <a:extLst>
+              <a:ext uri="{FF2B5EF4-FFF2-40B4-BE49-F238E27FC236}">
+                <a16:creationId xmlns:a16="http://schemas.microsoft.com/office/drawing/2014/main" id="{49515B72-4FEF-9470-FF61-14A865472CB3}"/>
+              </a:ext>
+            </a:extLst>
+          </p:cNvPr>
+          <p:cNvSpPr txBox="1"/>
+          <p:nvPr/>
+        </p:nvSpPr>
+        <p:spPr>
+          <a:xfrm>
+            <a:off x="4720949" y="4581781"/>
+            <a:ext cx="3185705" cy="821379"/>
+          </a:xfrm>
+          <a:prstGeom prst="rect">
+            <a:avLst/>
+          </a:prstGeom>
+          <a:noFill/>
+        </p:spPr>
+        <p:txBody>
+          <a:bodyPr wrap="square" rtlCol="0">
+            <a:spAutoFit/>
+          </a:bodyPr>
+          <a:lstStyle/>
+          <a:p>
+            <a:pPr>
+              <a:lnSpc>
+                <a:spcPct val="150000"/>
+              </a:lnSpc>
+            </a:pPr>
+            <a:r>
+              <a:rPr lang="en-US" altLang="ko-KR" sz="1100" b="1" dirty="0"/>
+              <a:t>[ </a:t>
+            </a:r>
+            <a:r>
+              <a:rPr lang="ko-KR" altLang="en-US" sz="1100" b="1" dirty="0"/>
+              <a:t>정치 기관 </a:t>
+            </a:r>
+            <a:r>
+              <a:rPr lang="en-US" altLang="ko-KR" sz="1100" b="1" dirty="0"/>
+              <a:t>]</a:t>
+            </a:r>
+          </a:p>
+          <a:p>
+            <a:pPr marL="171450" indent="-171450">
+              <a:lnSpc>
+                <a:spcPct val="150000"/>
+              </a:lnSpc>
+              <a:buFont typeface="Arial" panose="020B0604020202020204" pitchFamily="34" charset="0"/>
+              <a:buChar char="•"/>
+            </a:pPr>
+            <a:r>
+              <a:rPr lang="ko-KR" altLang="en-US" sz="1100" dirty="0"/>
+              <a:t>기능 </a:t>
+            </a:r>
+            <a:r>
+              <a:rPr lang="en-US" altLang="ko-KR" sz="1100" dirty="0"/>
+              <a:t>: </a:t>
+            </a:r>
+            <a:r>
+              <a:rPr lang="ko-KR" altLang="en-US" sz="1100" dirty="0"/>
+              <a:t>호출 </a:t>
+            </a:r>
+            <a:r>
+              <a:rPr lang="en-US" altLang="ko-KR" sz="1100" dirty="0"/>
+              <a:t>/ </a:t>
+            </a:r>
+            <a:r>
+              <a:rPr lang="ko-KR" altLang="en-US" sz="1100" dirty="0"/>
+              <a:t>명령</a:t>
+            </a:r>
+            <a:endParaRPr lang="en-US" altLang="ko-KR" sz="1100" dirty="0"/>
+          </a:p>
+          <a:p>
+            <a:pPr marL="171450" indent="-171450">
+              <a:lnSpc>
+                <a:spcPct val="150000"/>
+              </a:lnSpc>
+              <a:buFont typeface="Arial" panose="020B0604020202020204" pitchFamily="34" charset="0"/>
+              <a:buChar char="•"/>
+            </a:pPr>
+            <a:r>
+              <a:rPr lang="ko-KR" altLang="en-US" sz="1100" dirty="0"/>
+              <a:t>의미 </a:t>
+            </a:r>
+            <a:r>
+              <a:rPr lang="en-US" altLang="ko-KR" sz="1100" dirty="0"/>
+              <a:t>: </a:t>
+            </a:r>
+            <a:r>
+              <a:rPr lang="ko-KR" altLang="en-US" sz="1100" dirty="0"/>
+              <a:t>착취의 공식화</a:t>
+            </a:r>
+            <a:endParaRPr lang="en-US" altLang="ko-KR" sz="1100" dirty="0"/>
+          </a:p>
+        </p:txBody>
+      </p:sp>
+      <p:sp>
+        <p:nvSpPr>
+          <p:cNvPr id="13" name="TextBox 12">
+            <a:extLst>
+              <a:ext uri="{FF2B5EF4-FFF2-40B4-BE49-F238E27FC236}">
+                <a16:creationId xmlns:a16="http://schemas.microsoft.com/office/drawing/2014/main" id="{6722BE7C-D321-EE07-873B-881A054240B2}"/>
+              </a:ext>
+            </a:extLst>
+          </p:cNvPr>
+          <p:cNvSpPr txBox="1"/>
+          <p:nvPr/>
+        </p:nvSpPr>
+        <p:spPr>
+          <a:xfrm>
+            <a:off x="8410592" y="2042625"/>
+            <a:ext cx="3781408" cy="3360535"/>
+          </a:xfrm>
+          <a:prstGeom prst="rect">
+            <a:avLst/>
+          </a:prstGeom>
+          <a:noFill/>
+        </p:spPr>
+        <p:txBody>
+          <a:bodyPr wrap="square" rtlCol="0">
+            <a:spAutoFit/>
+          </a:bodyPr>
+          <a:lstStyle/>
+          <a:p>
+            <a:pPr>
+              <a:lnSpc>
+                <a:spcPct val="150000"/>
+              </a:lnSpc>
+            </a:pPr>
+            <a:r>
+              <a:rPr lang="en-US" altLang="ko-KR" sz="1100" b="1" dirty="0"/>
+              <a:t>[ </a:t>
+            </a:r>
+            <a:r>
+              <a:rPr lang="ko-KR" altLang="en-US" sz="1100" b="1" dirty="0"/>
+              <a:t>사건 발생 구역</a:t>
+            </a:r>
+            <a:r>
+              <a:rPr lang="en-US" altLang="ko-KR" sz="1100" b="1" dirty="0"/>
+              <a:t> ]</a:t>
+            </a:r>
+          </a:p>
+          <a:p>
+            <a:pPr marL="171450" indent="-171450">
+              <a:lnSpc>
+                <a:spcPct val="150000"/>
+              </a:lnSpc>
+              <a:buFont typeface="Arial" panose="020B0604020202020204" pitchFamily="34" charset="0"/>
+              <a:buChar char="•"/>
+            </a:pPr>
+            <a:r>
+              <a:rPr lang="ko-KR" altLang="en-US" sz="1100" dirty="0"/>
+              <a:t>구성</a:t>
+            </a:r>
+            <a:endParaRPr lang="en-US" altLang="ko-KR" sz="1100" dirty="0"/>
+          </a:p>
+          <a:p>
+            <a:pPr marL="628650" lvl="1" indent="-171450">
+              <a:lnSpc>
+                <a:spcPct val="150000"/>
+              </a:lnSpc>
+              <a:buFont typeface="Arial" panose="020B0604020202020204" pitchFamily="34" charset="0"/>
+              <a:buChar char="•"/>
+            </a:pPr>
+            <a:r>
+              <a:rPr lang="ko-KR" altLang="en-US" sz="1100" dirty="0"/>
+              <a:t>균열 발생</a:t>
+            </a:r>
+            <a:endParaRPr lang="en-US" altLang="ko-KR" sz="1100" dirty="0"/>
+          </a:p>
+          <a:p>
+            <a:pPr marL="628650" lvl="1" indent="-171450">
+              <a:lnSpc>
+                <a:spcPct val="150000"/>
+              </a:lnSpc>
+              <a:buFont typeface="Arial" panose="020B0604020202020204" pitchFamily="34" charset="0"/>
+              <a:buChar char="•"/>
+            </a:pPr>
+            <a:r>
+              <a:rPr lang="ko-KR" altLang="en-US" sz="1100" dirty="0"/>
+              <a:t>동시다발적 사건</a:t>
+            </a:r>
+            <a:endParaRPr lang="en-US" altLang="ko-KR" sz="1100" dirty="0"/>
+          </a:p>
+          <a:p>
+            <a:pPr marL="628650" lvl="1" indent="-171450">
+              <a:lnSpc>
+                <a:spcPct val="150000"/>
+              </a:lnSpc>
+              <a:buFont typeface="Arial" panose="020B0604020202020204" pitchFamily="34" charset="0"/>
+              <a:buChar char="•"/>
+            </a:pPr>
+            <a:r>
+              <a:rPr lang="ko-KR" altLang="en-US" sz="1100" dirty="0"/>
+              <a:t>변이 진행</a:t>
+            </a:r>
+            <a:endParaRPr lang="en-US" altLang="ko-KR" sz="1100" dirty="0"/>
+          </a:p>
+          <a:p>
+            <a:pPr marL="171450" indent="-171450">
+              <a:lnSpc>
+                <a:spcPct val="150000"/>
+              </a:lnSpc>
+              <a:buFont typeface="Arial" panose="020B0604020202020204" pitchFamily="34" charset="0"/>
+              <a:buChar char="•"/>
+            </a:pPr>
+            <a:r>
+              <a:rPr lang="ko-KR" altLang="en-US" sz="1100" dirty="0"/>
+              <a:t>시스템</a:t>
+            </a:r>
+            <a:endParaRPr lang="en-US" altLang="ko-KR" sz="1100" dirty="0"/>
+          </a:p>
+          <a:p>
+            <a:pPr marL="628650" lvl="1" indent="-171450">
+              <a:lnSpc>
+                <a:spcPct val="150000"/>
+              </a:lnSpc>
+              <a:buFont typeface="Arial" panose="020B0604020202020204" pitchFamily="34" charset="0"/>
+              <a:buChar char="•"/>
+            </a:pPr>
+            <a:r>
+              <a:rPr lang="ko-KR" altLang="en-US" sz="1100" dirty="0"/>
+              <a:t>다수의 요청 동시다발적 발생</a:t>
+            </a:r>
+            <a:endParaRPr lang="en-US" altLang="ko-KR" sz="1100" dirty="0"/>
+          </a:p>
+          <a:p>
+            <a:pPr marL="628650" lvl="1" indent="-171450">
+              <a:lnSpc>
+                <a:spcPct val="150000"/>
+              </a:lnSpc>
+              <a:buFont typeface="Arial" panose="020B0604020202020204" pitchFamily="34" charset="0"/>
+              <a:buChar char="•"/>
+            </a:pPr>
+            <a:r>
+              <a:rPr lang="ko-KR" altLang="en-US" sz="1100" dirty="0"/>
+              <a:t>선택 강요 </a:t>
+            </a:r>
+            <a:r>
+              <a:rPr lang="en-US" altLang="ko-KR" sz="1100" dirty="0"/>
+              <a:t>(</a:t>
+            </a:r>
+            <a:r>
+              <a:rPr lang="ko-KR" altLang="en-US" sz="1100" dirty="0"/>
+              <a:t>누구를 먼저 도울 것인가</a:t>
+            </a:r>
+            <a:r>
+              <a:rPr lang="en-US" altLang="ko-KR" sz="1100" dirty="0"/>
+              <a:t>)</a:t>
+            </a:r>
+          </a:p>
+          <a:p>
+            <a:pPr marL="628650" lvl="1" indent="-171450">
+              <a:lnSpc>
+                <a:spcPct val="150000"/>
+              </a:lnSpc>
+              <a:buFont typeface="Arial" panose="020B0604020202020204" pitchFamily="34" charset="0"/>
+              <a:buChar char="•"/>
+            </a:pPr>
+            <a:r>
+              <a:rPr lang="ko-KR" altLang="en-US" sz="1100" dirty="0"/>
+              <a:t>선택하지 않은 대상 붕괴</a:t>
+            </a:r>
+            <a:endParaRPr lang="en-US" altLang="ko-KR" sz="1100" dirty="0"/>
+          </a:p>
+          <a:p>
+            <a:pPr marL="171450" indent="-171450">
+              <a:lnSpc>
+                <a:spcPct val="150000"/>
+              </a:lnSpc>
+              <a:buFont typeface="Arial" panose="020B0604020202020204" pitchFamily="34" charset="0"/>
+              <a:buChar char="•"/>
+            </a:pPr>
+            <a:r>
+              <a:rPr lang="ko-KR" altLang="en-US" sz="1100" dirty="0"/>
+              <a:t>연출</a:t>
+            </a:r>
+            <a:endParaRPr lang="en-US" altLang="ko-KR" sz="1100" dirty="0"/>
+          </a:p>
+          <a:p>
+            <a:pPr marL="628650" lvl="1" indent="-171450">
+              <a:lnSpc>
+                <a:spcPct val="150000"/>
+              </a:lnSpc>
+              <a:buFont typeface="Arial" panose="020B0604020202020204" pitchFamily="34" charset="0"/>
+              <a:buChar char="•"/>
+            </a:pPr>
+            <a:r>
+              <a:rPr lang="ko-KR" altLang="en-US" sz="1100" dirty="0"/>
+              <a:t>구조 요청</a:t>
+            </a:r>
+            <a:r>
+              <a:rPr lang="en-US" altLang="ko-KR" sz="1100" dirty="0"/>
+              <a:t>, </a:t>
+            </a:r>
+            <a:r>
+              <a:rPr lang="ko-KR" altLang="en-US" sz="1100" dirty="0"/>
+              <a:t>비명</a:t>
+            </a:r>
+            <a:r>
+              <a:rPr lang="en-US" altLang="ko-KR" sz="1100" dirty="0"/>
+              <a:t>, </a:t>
+            </a:r>
+            <a:r>
+              <a:rPr lang="ko-KR" altLang="en-US" sz="1100" dirty="0"/>
+              <a:t>방송</a:t>
+            </a:r>
+            <a:r>
+              <a:rPr lang="en-US" altLang="ko-KR" sz="1100" dirty="0"/>
+              <a:t>, </a:t>
+            </a:r>
+            <a:r>
+              <a:rPr lang="ko-KR" altLang="en-US" sz="1100" dirty="0"/>
+              <a:t>알림의 중첩</a:t>
+            </a:r>
+            <a:endParaRPr lang="en-US" altLang="ko-KR" sz="1100" dirty="0"/>
+          </a:p>
+          <a:p>
+            <a:pPr marL="628650" lvl="1" indent="-171450">
+              <a:lnSpc>
+                <a:spcPct val="150000"/>
+              </a:lnSpc>
+              <a:buFont typeface="Arial" panose="020B0604020202020204" pitchFamily="34" charset="0"/>
+              <a:buChar char="•"/>
+            </a:pPr>
+            <a:r>
+              <a:rPr lang="ko-KR" altLang="en-US" sz="1100" dirty="0"/>
+              <a:t>시간 압박</a:t>
+            </a:r>
+            <a:endParaRPr lang="en-US" altLang="ko-KR" sz="1100" dirty="0"/>
+          </a:p>
+          <a:p>
+            <a:pPr marL="171450" indent="-171450">
+              <a:lnSpc>
+                <a:spcPct val="150000"/>
+              </a:lnSpc>
+              <a:buFont typeface="Arial" panose="020B0604020202020204" pitchFamily="34" charset="0"/>
+              <a:buChar char="•"/>
+            </a:pPr>
+            <a:r>
+              <a:rPr lang="ko-KR" altLang="en-US" sz="1100" dirty="0"/>
+              <a:t>의미 </a:t>
+            </a:r>
+            <a:r>
+              <a:rPr lang="en-US" altLang="ko-KR" sz="1100" dirty="0"/>
+              <a:t>: </a:t>
+            </a:r>
+            <a:r>
+              <a:rPr lang="ko-KR" altLang="en-US" sz="1100" dirty="0"/>
+              <a:t>끝나지 않는 수요 </a:t>
+            </a:r>
+            <a:r>
+              <a:rPr lang="en-US" altLang="ko-KR" sz="1100" dirty="0"/>
+              <a:t>+ </a:t>
+            </a:r>
+            <a:r>
+              <a:rPr lang="ko-KR" altLang="en-US" sz="1100" dirty="0"/>
+              <a:t>선택에 따른 죄책감</a:t>
+            </a:r>
+            <a:endParaRPr lang="en-US" altLang="ko-KR" sz="1100" dirty="0"/>
+          </a:p>
+        </p:txBody>
+      </p:sp>
+    </p:spTree>
+    <p:extLst>
+      <p:ext uri="{BB962C8B-B14F-4D97-AF65-F5344CB8AC3E}">
+        <p14:creationId xmlns:p14="http://schemas.microsoft.com/office/powerpoint/2010/main" val="1958167432"/>
+      </p:ext>
+    </p:extLst>
+  </p:cSld>
+  <p:clrMapOvr>
+    <a:masterClrMapping/>
+  </p:clrMapOvr>
+</p:sld>
+</file>
+
+<file path=ppt/slides/slide7.xml><?xml version="1.0" encoding="utf-8"?>
+<p:sld xmlns:a="http://schemas.openxmlformats.org/drawingml/2006/main" xmlns:r="http://schemas.openxmlformats.org/officeDocument/2006/relationships" xmlns:p="http://schemas.openxmlformats.org/presentationml/2006/main">
+  <p:cSld>
+    <p:spTree>
+      <p:nvGrpSpPr>
+        <p:cNvPr id="1" name=""/>
+        <p:cNvGrpSpPr/>
+        <p:nvPr/>
+      </p:nvGrpSpPr>
+      <p:grpSpPr>
+        <a:xfrm>
+          <a:off x="0" y="0"/>
+          <a:ext cx="0" cy="0"/>
+          <a:chOff x="0" y="0"/>
+          <a:chExt cx="0" cy="0"/>
+        </a:xfrm>
+      </p:grpSpPr>
+      <p:sp>
+        <p:nvSpPr>
+          <p:cNvPr id="4" name="TextBox 3">
+            <a:extLst>
+              <a:ext uri="{FF2B5EF4-FFF2-40B4-BE49-F238E27FC236}">
+                <a16:creationId xmlns:a16="http://schemas.microsoft.com/office/drawing/2014/main" id="{E3C49264-198A-B524-7B14-3C9562D61B41}"/>
+              </a:ext>
+            </a:extLst>
+          </p:cNvPr>
+          <p:cNvSpPr txBox="1"/>
+          <p:nvPr/>
+        </p:nvSpPr>
+        <p:spPr>
+          <a:xfrm>
+            <a:off x="762973" y="645383"/>
+            <a:ext cx="2917372" cy="446276"/>
+          </a:xfrm>
+          <a:prstGeom prst="rect">
+            <a:avLst/>
+          </a:prstGeom>
+          <a:noFill/>
+        </p:spPr>
+        <p:txBody>
+          <a:bodyPr wrap="square" rtlCol="0">
+            <a:spAutoFit/>
+          </a:bodyPr>
+          <a:lstStyle/>
+          <a:p>
+            <a:pPr algn="just"/>
+            <a:r>
+              <a:rPr lang="ko-KR" altLang="en-US" sz="2300" b="1" dirty="0"/>
+              <a:t>시나리오 흐름 정리</a:t>
+            </a:r>
+          </a:p>
+        </p:txBody>
+      </p:sp>
+      <p:sp>
+        <p:nvSpPr>
+          <p:cNvPr id="5" name="TextBox 4">
+            <a:extLst>
+              <a:ext uri="{FF2B5EF4-FFF2-40B4-BE49-F238E27FC236}">
+                <a16:creationId xmlns:a16="http://schemas.microsoft.com/office/drawing/2014/main" id="{10BFF803-E6D2-79E1-F9E3-4E1E6803B07C}"/>
+              </a:ext>
+            </a:extLst>
+          </p:cNvPr>
+          <p:cNvSpPr txBox="1"/>
+          <p:nvPr/>
+        </p:nvSpPr>
+        <p:spPr>
+          <a:xfrm>
+            <a:off x="762973" y="2042625"/>
+            <a:ext cx="3185705" cy="313547"/>
+          </a:xfrm>
+          <a:prstGeom prst="rect">
+            <a:avLst/>
+          </a:prstGeom>
+          <a:noFill/>
+        </p:spPr>
+        <p:txBody>
+          <a:bodyPr wrap="square" rtlCol="0">
+            <a:spAutoFit/>
+          </a:bodyPr>
+          <a:lstStyle/>
+          <a:p>
+            <a:pPr>
+              <a:lnSpc>
+                <a:spcPct val="150000"/>
+              </a:lnSpc>
+            </a:pPr>
+            <a:r>
+              <a:rPr lang="ko-KR" altLang="en-US" sz="1100"/>
+              <a:t>도시 중심부</a:t>
+            </a:r>
+            <a:endParaRPr lang="en-US" altLang="ko-KR" sz="1100" dirty="0"/>
+          </a:p>
+        </p:txBody>
+      </p:sp>
+    </p:spTree>
+    <p:extLst>
+      <p:ext uri="{BB962C8B-B14F-4D97-AF65-F5344CB8AC3E}">
+        <p14:creationId xmlns:p14="http://schemas.microsoft.com/office/powerpoint/2010/main" val="3530151398"/>
       </p:ext>
     </p:extLst>
   </p:cSld>
